--- a/presentations/CONUS_gridMET_ERA5_LabMeeting/CONUS_gridMET_ERA5_LabMeeting.pptx
+++ b/presentations/CONUS_gridMET_ERA5_LabMeeting/CONUS_gridMET_ERA5_LabMeeting.pptx
@@ -3185,7 +3185,7 @@
                 </a:solidFill>
                 <a:latin typeface="Calibri"/>
               </a:rPr>
-              <a:t>Zero-Shot Chronos-2 for LAI Forecasting: Two Large-Scale CONUS Studies</a:t>
+              <a:t>Zero-Shot Chronos-2 for LAI Forecasting: From CONUS to the Globe</a:t>
             </a:r>
           </a:p>
         </p:txBody>
@@ -3314,7 +3314,7 @@
                 </a:solidFill>
                 <a:latin typeface="Calibri"/>
               </a:rPr>
-              <a:t>Experiment 1: gridMET zero-shot generalization, expanded to a 32-pixel purity-filtered CONUS subset.</a:t>
+              <a:t>Part 1: gridMET zero-shot generalization, expanded to a 32-pixel purity-filtered CONUS subset.</a:t>
             </a:r>
           </a:p>
           <a:p>
@@ -3342,7 +3342,7 @@
                 </a:solidFill>
                 <a:latin typeface="Calibri"/>
               </a:rPr>
-              <a:t>Experiment 2: switching the meteorological source to cloud-hosted ERA5 (Google ARCO-ERA5) and scaling to the full 70-pixel CONUS pool with a matched 22-year context.</a:t>
+              <a:t>Part 2: does the same zero-shot pattern hold outside the U.S.? 70 pixels spanning 14 world regions, cloud ERA5 climate + MODIS LAI ground truth (no CONUS pixels, no gridMET).</a:t>
             </a:r>
           </a:p>
           <a:p>
@@ -3370,7 +3370,7 @@
                 </a:solidFill>
                 <a:latin typeface="Calibri"/>
               </a:rPr>
-              <a:t>Chronos-2 used strictly zero-shot throughout both experiments: no training or fine-tuning.</a:t>
+              <a:t>Chronos-2 used strictly zero-shot throughout both parts: no training or fine-tuning.</a:t>
             </a:r>
           </a:p>
         </p:txBody>
@@ -3536,7 +3536,7 @@
                 </a:solidFill>
                 <a:latin typeface="Calibri"/>
               </a:rPr>
-              <a:t>Two independently sourced meteorological datasets, same 70-pixel CONUS pool, same zero-shot protocol — a direct test of how robust the earlier gridMET result really is.</a:t>
+              <a:t>Part 1 asks whether the original result was cherry-picked within CONUS; Part 2 asks whether it holds at all outside CONUS.</a:t>
             </a:r>
           </a:p>
         </p:txBody>
@@ -3640,7 +3640,7 @@
                 </a:solidFill>
                 <a:latin typeface="Calibri"/>
               </a:rPr>
-              <a:t>ERA5 (Cloud) vs. gridMET — Same 70 Pixels, Same Context</a:t>
+              <a:t>Integrating Part 1 &amp; Part 2: CONUS vs. Global</a:t>
             </a:r>
           </a:p>
         </p:txBody>
@@ -3730,7 +3730,7 @@
       </p:sp>
       <p:pic>
         <p:nvPicPr>
-          <p:cNvPr id="6" name="Picture 5" descr="era5_vs_gridmet_winloss.png"/>
+          <p:cNvPr id="6" name="Picture 5" descr="conus_vs_global_r2_boxplot.png"/>
           <p:cNvPicPr>
             <a:picLocks noChangeAspect="1"/>
           </p:cNvPicPr>
@@ -3744,38 +3744,93 @@
         </p:blipFill>
         <p:spPr>
           <a:xfrm>
-            <a:off x="502920" y="2334172"/>
-            <a:ext cx="5394960" cy="2482264"/>
+            <a:off x="3385964" y="1143000"/>
+            <a:ext cx="5481031" cy="4864608"/>
           </a:xfrm>
           <a:prstGeom prst="rect">
             <a:avLst/>
           </a:prstGeom>
         </p:spPr>
       </p:pic>
-      <p:pic>
-        <p:nvPicPr>
-          <p:cNvPr id="7" name="Picture 6" descr="exp2_vs_gridmet_scatter.png"/>
-          <p:cNvPicPr>
-            <a:picLocks noChangeAspect="1"/>
-          </p:cNvPicPr>
-          <p:nvPr/>
-        </p:nvPicPr>
-        <p:blipFill>
-          <a:blip r:embed="rId3"/>
-          <a:stretch>
-            <a:fillRect/>
-          </a:stretch>
-        </p:blipFill>
-        <p:spPr>
-          <a:xfrm>
-            <a:off x="6300216" y="1143000"/>
-            <a:ext cx="4864608" cy="4864608"/>
-          </a:xfrm>
-          <a:prstGeom prst="rect">
-            <a:avLst/>
-          </a:prstGeom>
-        </p:spPr>
-      </p:pic>
+      <p:sp>
+        <p:nvSpPr>
+          <p:cNvPr id="7" name="TextBox 6"/>
+          <p:cNvSpPr txBox="1"/>
+          <p:nvPr/>
+        </p:nvSpPr>
+        <p:spPr>
+          <a:xfrm>
+            <a:off x="502920" y="1417320"/>
+            <a:ext cx="2103120" cy="3657600"/>
+          </a:xfrm>
+          <a:prstGeom prst="rect">
+            <a:avLst/>
+          </a:prstGeom>
+          <a:noFill/>
+        </p:spPr>
+        <p:txBody>
+          <a:bodyPr wrap="square" anchor="t" lIns="0" rIns="0">
+            <a:spAutoFit/>
+          </a:bodyPr>
+          <a:lstStyle/>
+          <a:p>
+            <a:pPr>
+              <a:lnSpc>
+                <a:spcPct val="106000"/>
+              </a:lnSpc>
+              <a:spcAft>
+                <a:spcPts val="800"/>
+              </a:spcAft>
+            </a:pPr>
+            <a:r>
+              <a:rPr sz="1150">
+                <a:solidFill>
+                  <a:srgbClr val="2F6F5E"/>
+                </a:solidFill>
+                <a:latin typeface="Calibri"/>
+              </a:rPr>
+              <a:t>▪  </a:t>
+            </a:r>
+            <a:r>
+              <a:rPr sz="1150">
+                <a:solidFill>
+                  <a:srgbClr val="1C2119"/>
+                </a:solidFill>
+                <a:latin typeface="Calibri"/>
+              </a:rPr>
+              <a:t>n=32 (Part 1) vs. n=68 (Part 2) — disjoint pixel sets, not matched pairs, so this is a distributional comparison, not a per-pixel scatter.</a:t>
+            </a:r>
+          </a:p>
+          <a:p>
+            <a:pPr>
+              <a:lnSpc>
+                <a:spcPct val="106000"/>
+              </a:lnSpc>
+              <a:spcAft>
+                <a:spcPts val="800"/>
+              </a:spcAft>
+            </a:pPr>
+            <a:r>
+              <a:rPr sz="1150">
+                <a:solidFill>
+                  <a:srgbClr val="2F6F5E"/>
+                </a:solidFill>
+                <a:latin typeface="Calibri"/>
+              </a:rPr>
+              <a:t>▪  </a:t>
+            </a:r>
+            <a:r>
+              <a:rPr sz="1150">
+                <a:solidFill>
+                  <a:srgbClr val="1C2119"/>
+                </a:solidFill>
+                <a:latin typeface="Calibri"/>
+              </a:rPr>
+              <a:t>context-length vs. R² correlation within Part 2 is only r=0.16 — the gap is not mainly a context-length artifact.</a:t>
+            </a:r>
+          </a:p>
+        </p:txBody>
+      </p:sp>
       <p:sp>
         <p:nvSpPr>
           <p:cNvPr id="8" name="Rectangle 7"/>
@@ -3937,7 +3992,7 @@
                 </a:solidFill>
                 <a:latin typeface="Calibri"/>
               </a:rPr>
-              <a:t>ERA5 higher on 31/70, gridMET higher on 39/70, medians differ by only 0.015 — not a uniform win for either source.</a:t>
+              <a:t>Median R² drops from 0.865 (CONUS) to 0.353 (global) — the strongest CONUS finding does not transfer uniformly worldwide.</a:t>
             </a:r>
           </a:p>
         </p:txBody>
@@ -4002,7 +4057,7 @@
                 </a:solidFill>
                 <a:latin typeface="Calibri"/>
               </a:rPr>
-              <a:t>WHERE EACH SOURCE STRUGGLES</a:t>
+              <a:t>WHERE THE GLOBAL EXPERIMENT STRUGGLES</a:t>
             </a:r>
           </a:p>
         </p:txBody>
@@ -4041,7 +4096,7 @@
                 </a:solidFill>
                 <a:latin typeface="Calibri"/>
               </a:rPr>
-              <a:t>Failure Cases &amp; Vegetation-Class Patterns</a:t>
+              <a:t>Part 2 Failure Cases &amp; Regional Patterns</a:t>
             </a:r>
           </a:p>
         </p:txBody>
@@ -4129,30 +4184,57 @@
           </a:p>
         </p:txBody>
       </p:sp>
-      <p:pic>
-        <p:nvPicPr>
-          <p:cNvPr id="6" name="Picture 5" descr="era5_vs_gridmet_byclass.png"/>
-          <p:cNvPicPr>
-            <a:picLocks noChangeAspect="1"/>
-          </p:cNvPicPr>
-          <p:nvPr/>
-        </p:nvPicPr>
-        <p:blipFill>
-          <a:blip r:embed="rId2"/>
-          <a:stretch>
-            <a:fillRect/>
-          </a:stretch>
-        </p:blipFill>
-        <p:spPr>
-          <a:xfrm>
-            <a:off x="3214176" y="1143000"/>
-            <a:ext cx="5763342" cy="2651760"/>
-          </a:xfrm>
-          <a:prstGeom prst="rect">
-            <a:avLst/>
-          </a:prstGeom>
-        </p:spPr>
-      </p:pic>
+      <p:sp>
+        <p:nvSpPr>
+          <p:cNvPr id="6" name="TextBox 5"/>
+          <p:cNvSpPr txBox="1"/>
+          <p:nvPr/>
+        </p:nvSpPr>
+        <p:spPr>
+          <a:xfrm>
+            <a:off x="502920" y="1143000"/>
+            <a:ext cx="10789920" cy="822960"/>
+          </a:xfrm>
+          <a:prstGeom prst="rect">
+            <a:avLst/>
+          </a:prstGeom>
+          <a:noFill/>
+        </p:spPr>
+        <p:txBody>
+          <a:bodyPr wrap="square" anchor="t" lIns="0" rIns="0">
+            <a:spAutoFit/>
+          </a:bodyPr>
+          <a:lstStyle/>
+          <a:p>
+            <a:pPr>
+              <a:lnSpc>
+                <a:spcPct val="106000"/>
+              </a:lnSpc>
+              <a:spcAft>
+                <a:spcPts val="600"/>
+              </a:spcAft>
+            </a:pPr>
+            <a:r>
+              <a:rPr sz="1350">
+                <a:solidFill>
+                  <a:srgbClr val="2F6F5E"/>
+                </a:solidFill>
+                <a:latin typeface="Calibri"/>
+              </a:rPr>
+              <a:t>▪  </a:t>
+            </a:r>
+            <a:r>
+              <a:rPr sz="1350">
+                <a:solidFill>
+                  <a:srgbClr val="1C2119"/>
+                </a:solidFill>
+                <a:latin typeface="Calibri"/>
+              </a:rPr>
+              <a:t>Two distinct failure modes: genuine anti-correlation (worst case, Amazon, Pearson r=-0.50 — direction, not just magnitude, is wrong) vs. directionally-right-but-miscalibrated (most other negative-R² pixels, e.g. Canada/Siberia pixels with Pearson r &gt; +0.68 despite R² &lt; 0).</a:t>
+            </a:r>
+          </a:p>
+        </p:txBody>
+      </p:sp>
       <p:graphicFrame>
         <p:nvGraphicFramePr>
           <p:cNvPr id="7" name="Table 6"/>
@@ -4162,8 +4244,8 @@
           <p:nvPr/>
         </p:nvGraphicFramePr>
         <p:xfrm>
-          <a:off x="502920" y="3931920"/>
-          <a:ext cx="11185852" cy="2057400"/>
+          <a:off x="502920" y="2057400"/>
+          <a:ext cx="11185853" cy="2834640"/>
         </p:xfrm>
         <a:graphic>
           <a:graphicData uri="http://schemas.openxmlformats.org/drawingml/2006/table">
@@ -4172,13 +4254,14 @@
                 <a:tableStyleId>{5C22544A-7EE6-4342-B048-85BDC9FD1C3A}</a:tableStyleId>
               </a:tblPr>
               <a:tblGrid>
-                <a:gridCol w="2908322"/>
-                <a:gridCol w="2013453"/>
+                <a:gridCol w="2460888"/>
+                <a:gridCol w="1789736"/>
                 <a:gridCol w="2684605"/>
-                <a:gridCol w="1789736"/>
-                <a:gridCol w="1789736"/>
+                <a:gridCol w="1454161"/>
+                <a:gridCol w="1454161"/>
+                <a:gridCol w="1342302"/>
               </a:tblGrid>
-              <a:tr h="293914">
+              <a:tr h="314960">
                 <a:tc>
                   <a:txBody>
                     <a:bodyPr/>
@@ -4186,7 +4269,7 @@
                     <a:p>
                       <a:pPr algn="l"/>
                       <a:r>
-                        <a:rPr sz="1150" b="1">
+                        <a:rPr sz="1100" b="1">
                           <a:solidFill>
                             <a:srgbClr val="FFFFFF"/>
                           </a:solidFill>
@@ -4209,7 +4292,7 @@
                     <a:p>
                       <a:pPr algn="ctr"/>
                       <a:r>
-                        <a:rPr sz="1150" b="1">
+                        <a:rPr sz="1100" b="1">
                           <a:solidFill>
                             <a:srgbClr val="FFFFFF"/>
                           </a:solidFill>
@@ -4232,7 +4315,7 @@
                     <a:p>
                       <a:pPr algn="ctr"/>
                       <a:r>
-                        <a:rPr sz="1150" b="1">
+                        <a:rPr sz="1100" b="1">
                           <a:solidFill>
                             <a:srgbClr val="FFFFFF"/>
                           </a:solidFill>
@@ -4255,13 +4338,13 @@
                     <a:p>
                       <a:pPr algn="ctr"/>
                       <a:r>
-                        <a:rPr sz="1150" b="1">
+                        <a:rPr sz="1100" b="1">
                           <a:solidFill>
                             <a:srgbClr val="FFFFFF"/>
                           </a:solidFill>
                           <a:latin typeface="Calibri"/>
                         </a:rPr>
-                        <a:t>R² (ERA5)</a:t>
+                        <a:t>R²</a:t>
                       </a:r>
                     </a:p>
                   </a:txBody>
@@ -4278,13 +4361,13 @@
                     <a:p>
                       <a:pPr algn="ctr"/>
                       <a:r>
-                        <a:rPr sz="1150" b="1">
+                        <a:rPr sz="1100" b="1">
                           <a:solidFill>
                             <a:srgbClr val="FFFFFF"/>
                           </a:solidFill>
                           <a:latin typeface="Calibri"/>
                         </a:rPr>
-                        <a:t>R² (gridMET)</a:t>
+                        <a:t>Pearson r</a:t>
                       </a:r>
                     </a:p>
                   </a:txBody>
@@ -4294,8 +4377,31 @@
                     </a:solidFill>
                   </a:tcPr>
                 </a:tc>
+                <a:tc>
+                  <a:txBody>
+                    <a:bodyPr/>
+                    <a:lstStyle/>
+                    <a:p>
+                      <a:pPr algn="ctr"/>
+                      <a:r>
+                        <a:rPr sz="1100" b="1">
+                          <a:solidFill>
+                            <a:srgbClr val="FFFFFF"/>
+                          </a:solidFill>
+                          <a:latin typeface="Calibri"/>
+                        </a:rPr>
+                        <a:t>Context</a:t>
+                      </a:r>
+                    </a:p>
+                  </a:txBody>
+                  <a:tcPr marT="38100" marB="38100">
+                    <a:solidFill>
+                      <a:srgbClr val="2F6F5E"/>
+                    </a:solidFill>
+                  </a:tcPr>
+                </a:tc>
               </a:tr>
-              <a:tr h="293914">
+              <a:tr h="314960">
                 <a:tc>
                   <a:txBody>
                     <a:bodyPr/>
@@ -4303,13 +4409,13 @@
                     <a:p>
                       <a:pPr algn="l"/>
                       <a:r>
-                        <a:rPr sz="1080" b="1">
+                        <a:rPr sz="1030" b="1">
                           <a:solidFill>
                             <a:srgbClr val="1C2119"/>
                           </a:solidFill>
                           <a:latin typeface="Calibri"/>
                         </a:rPr>
-                        <a:t>px047_grass_nat</a:t>
+                        <a:t>g052_grass_nat</a:t>
                       </a:r>
                     </a:p>
                   </a:txBody>
@@ -4326,13 +4432,13 @@
                     <a:p>
                       <a:pPr algn="ctr"/>
                       <a:r>
-                        <a:rPr sz="1080" b="0">
+                        <a:rPr sz="1030" b="0">
                           <a:solidFill>
                             <a:srgbClr val="1C2119"/>
                           </a:solidFill>
                           <a:latin typeface="Calibri"/>
                         </a:rPr>
-                        <a:t>GRASS_NAT</a:t>
+                        <a:t>GRASS-NAT</a:t>
                       </a:r>
                     </a:p>
                   </a:txBody>
@@ -4349,13 +4455,13 @@
                     <a:p>
                       <a:pPr algn="ctr"/>
                       <a:r>
-                        <a:rPr sz="1080" b="0">
+                        <a:rPr sz="1030" b="0">
                           <a:solidFill>
                             <a:srgbClr val="1C2119"/>
                           </a:solidFill>
                           <a:latin typeface="Calibri"/>
                         </a:rPr>
-                        <a:t>Southwest</a:t>
+                        <a:t>Amazon / Tropical S. America</a:t>
                       </a:r>
                     </a:p>
                   </a:txBody>
@@ -4372,13 +4478,13 @@
                     <a:p>
                       <a:pPr algn="ctr"/>
                       <a:r>
-                        <a:rPr sz="1080" b="0">
+                        <a:rPr sz="1030" b="0">
                           <a:solidFill>
                             <a:srgbClr val="1C2119"/>
                           </a:solidFill>
                           <a:latin typeface="Calibri"/>
                         </a:rPr>
-                        <a:t>-0.667</a:t>
+                        <a:t>-0.934</a:t>
                       </a:r>
                     </a:p>
                   </a:txBody>
@@ -4395,13 +4501,13 @@
                     <a:p>
                       <a:pPr algn="ctr"/>
                       <a:r>
-                        <a:rPr sz="1080" b="0">
+                        <a:rPr sz="1030" b="0">
                           <a:solidFill>
                             <a:srgbClr val="1C2119"/>
                           </a:solidFill>
                           <a:latin typeface="Calibri"/>
                         </a:rPr>
-                        <a:t>-0.348</a:t>
+                        <a:t>-0.495</a:t>
                       </a:r>
                     </a:p>
                   </a:txBody>
@@ -4411,8 +4517,31 @@
                     </a:solidFill>
                   </a:tcPr>
                 </a:tc>
+                <a:tc>
+                  <a:txBody>
+                    <a:bodyPr/>
+                    <a:lstStyle/>
+                    <a:p>
+                      <a:pPr algn="ctr"/>
+                      <a:r>
+                        <a:rPr sz="1030" b="0">
+                          <a:solidFill>
+                            <a:srgbClr val="1C2119"/>
+                          </a:solidFill>
+                          <a:latin typeface="Calibri"/>
+                        </a:rPr>
+                        <a:t>381</a:t>
+                      </a:r>
+                    </a:p>
+                  </a:txBody>
+                  <a:tcPr marT="38100" marB="38100">
+                    <a:solidFill>
+                      <a:srgbClr val="FFFFFF"/>
+                    </a:solidFill>
+                  </a:tcPr>
+                </a:tc>
               </a:tr>
-              <a:tr h="293914">
+              <a:tr h="314960">
                 <a:tc>
                   <a:txBody>
                     <a:bodyPr/>
@@ -4420,13 +4549,13 @@
                     <a:p>
                       <a:pPr algn="l"/>
                       <a:r>
-                        <a:rPr sz="1080" b="1">
+                        <a:rPr sz="1030" b="1">
                           <a:solidFill>
                             <a:srgbClr val="1C2119"/>
                           </a:solidFill>
                           <a:latin typeface="Calibri"/>
                         </a:rPr>
-                        <a:t>px059_shrubs_bd</a:t>
+                        <a:t>g007_shrubs_ne</a:t>
                       </a:r>
                     </a:p>
                   </a:txBody>
@@ -4443,13 +4572,13 @@
                     <a:p>
                       <a:pPr algn="ctr"/>
                       <a:r>
-                        <a:rPr sz="1080" b="0">
+                        <a:rPr sz="1030" b="0">
                           <a:solidFill>
                             <a:srgbClr val="1C2119"/>
                           </a:solidFill>
                           <a:latin typeface="Calibri"/>
                         </a:rPr>
-                        <a:t>SHRUBS_BD</a:t>
+                        <a:t>SHRUBS-NE</a:t>
                       </a:r>
                     </a:p>
                   </a:txBody>
@@ -4466,13 +4595,13 @@
                     <a:p>
                       <a:pPr algn="ctr"/>
                       <a:r>
-                        <a:rPr sz="1080" b="0">
+                        <a:rPr sz="1030" b="0">
                           <a:solidFill>
                             <a:srgbClr val="1C2119"/>
                           </a:solidFill>
                           <a:latin typeface="Calibri"/>
                         </a:rPr>
-                        <a:t>Great Plains</a:t>
+                        <a:t>Other</a:t>
                       </a:r>
                     </a:p>
                   </a:txBody>
@@ -4489,13 +4618,13 @@
                     <a:p>
                       <a:pPr algn="ctr"/>
                       <a:r>
-                        <a:rPr sz="1080" b="0">
+                        <a:rPr sz="1030" b="0">
                           <a:solidFill>
                             <a:srgbClr val="1C2119"/>
                           </a:solidFill>
                           <a:latin typeface="Calibri"/>
                         </a:rPr>
-                        <a:t>-0.295</a:t>
+                        <a:t>-0.706</a:t>
                       </a:r>
                     </a:p>
                   </a:txBody>
@@ -4512,13 +4641,13 @@
                     <a:p>
                       <a:pPr algn="ctr"/>
                       <a:r>
-                        <a:rPr sz="1080" b="0">
+                        <a:rPr sz="1030" b="0">
                           <a:solidFill>
                             <a:srgbClr val="1C2119"/>
                           </a:solidFill>
                           <a:latin typeface="Calibri"/>
                         </a:rPr>
-                        <a:t>0.265</a:t>
+                        <a:t>0.169</a:t>
                       </a:r>
                     </a:p>
                   </a:txBody>
@@ -4528,8 +4657,31 @@
                     </a:solidFill>
                   </a:tcPr>
                 </a:tc>
+                <a:tc>
+                  <a:txBody>
+                    <a:bodyPr/>
+                    <a:lstStyle/>
+                    <a:p>
+                      <a:pPr algn="ctr"/>
+                      <a:r>
+                        <a:rPr sz="1030" b="0">
+                          <a:solidFill>
+                            <a:srgbClr val="1C2119"/>
+                          </a:solidFill>
+                          <a:latin typeface="Calibri"/>
+                        </a:rPr>
+                        <a:t>394</a:t>
+                      </a:r>
+                    </a:p>
+                  </a:txBody>
+                  <a:tcPr marT="38100" marB="38100">
+                    <a:solidFill>
+                      <a:srgbClr val="F5F6F1"/>
+                    </a:solidFill>
+                  </a:tcPr>
+                </a:tc>
               </a:tr>
-              <a:tr h="293914">
+              <a:tr h="314960">
                 <a:tc>
                   <a:txBody>
                     <a:bodyPr/>
@@ -4537,13 +4689,13 @@
                     <a:p>
                       <a:pPr algn="l"/>
                       <a:r>
-                        <a:rPr sz="1080" b="1">
+                        <a:rPr sz="1030" b="1">
                           <a:solidFill>
                             <a:srgbClr val="1C2119"/>
                           </a:solidFill>
                           <a:latin typeface="Calibri"/>
                         </a:rPr>
-                        <a:t>px045_grass_nat</a:t>
+                        <a:t>g057_grass_man</a:t>
                       </a:r>
                     </a:p>
                   </a:txBody>
@@ -4560,13 +4712,13 @@
                     <a:p>
                       <a:pPr algn="ctr"/>
                       <a:r>
-                        <a:rPr sz="1080" b="0">
+                        <a:rPr sz="1030" b="0">
                           <a:solidFill>
                             <a:srgbClr val="1C2119"/>
                           </a:solidFill>
                           <a:latin typeface="Calibri"/>
                         </a:rPr>
-                        <a:t>GRASS_NAT</a:t>
+                        <a:t>GRASS-MAN</a:t>
                       </a:r>
                     </a:p>
                   </a:txBody>
@@ -4583,13 +4735,13 @@
                     <a:p>
                       <a:pPr algn="ctr"/>
                       <a:r>
-                        <a:rPr sz="1080" b="0">
+                        <a:rPr sz="1030" b="0">
                           <a:solidFill>
                             <a:srgbClr val="1C2119"/>
                           </a:solidFill>
                           <a:latin typeface="Calibri"/>
                         </a:rPr>
-                        <a:t>Great Plains</a:t>
+                        <a:t>East Africa / Sahel</a:t>
                       </a:r>
                     </a:p>
                   </a:txBody>
@@ -4606,13 +4758,13 @@
                     <a:p>
                       <a:pPr algn="ctr"/>
                       <a:r>
-                        <a:rPr sz="1080" b="0">
+                        <a:rPr sz="1030" b="0">
                           <a:solidFill>
                             <a:srgbClr val="1C2119"/>
                           </a:solidFill>
                           <a:latin typeface="Calibri"/>
                         </a:rPr>
-                        <a:t>-0.263</a:t>
+                        <a:t>-0.593</a:t>
                       </a:r>
                     </a:p>
                   </a:txBody>
@@ -4629,13 +4781,13 @@
                     <a:p>
                       <a:pPr algn="ctr"/>
                       <a:r>
-                        <a:rPr sz="1080" b="0">
+                        <a:rPr sz="1030" b="0">
                           <a:solidFill>
                             <a:srgbClr val="1C2119"/>
                           </a:solidFill>
                           <a:latin typeface="Calibri"/>
                         </a:rPr>
-                        <a:t>-0.724</a:t>
+                        <a:t>0.254</a:t>
                       </a:r>
                     </a:p>
                   </a:txBody>
@@ -4645,8 +4797,31 @@
                     </a:solidFill>
                   </a:tcPr>
                 </a:tc>
+                <a:tc>
+                  <a:txBody>
+                    <a:bodyPr/>
+                    <a:lstStyle/>
+                    <a:p>
+                      <a:pPr algn="ctr"/>
+                      <a:r>
+                        <a:rPr sz="1030" b="0">
+                          <a:solidFill>
+                            <a:srgbClr val="1C2119"/>
+                          </a:solidFill>
+                          <a:latin typeface="Calibri"/>
+                        </a:rPr>
+                        <a:t>999</a:t>
+                      </a:r>
+                    </a:p>
+                  </a:txBody>
+                  <a:tcPr marT="38100" marB="38100">
+                    <a:solidFill>
+                      <a:srgbClr val="FFFFFF"/>
+                    </a:solidFill>
+                  </a:tcPr>
+                </a:tc>
               </a:tr>
-              <a:tr h="293914">
+              <a:tr h="314960">
                 <a:tc>
                   <a:txBody>
                     <a:bodyPr/>
@@ -4654,13 +4829,13 @@
                     <a:p>
                       <a:pPr algn="l"/>
                       <a:r>
-                        <a:rPr sz="1080" b="1">
+                        <a:rPr sz="1030" b="1">
                           <a:solidFill>
                             <a:srgbClr val="1C2119"/>
                           </a:solidFill>
                           <a:latin typeface="Calibri"/>
                         </a:rPr>
-                        <a:t>px009_shrubs_nd</a:t>
+                        <a:t>g058_shrubs_be</a:t>
                       </a:r>
                     </a:p>
                   </a:txBody>
@@ -4677,13 +4852,13 @@
                     <a:p>
                       <a:pPr algn="ctr"/>
                       <a:r>
-                        <a:rPr sz="1080" b="0">
+                        <a:rPr sz="1030" b="0">
                           <a:solidFill>
                             <a:srgbClr val="1C2119"/>
                           </a:solidFill>
                           <a:latin typeface="Calibri"/>
                         </a:rPr>
-                        <a:t>SHRUBS_ND</a:t>
+                        <a:t>SHRUBS-BE</a:t>
                       </a:r>
                     </a:p>
                   </a:txBody>
@@ -4700,7 +4875,7 @@
                     <a:p>
                       <a:pPr algn="ctr"/>
                       <a:r>
-                        <a:rPr sz="1080" b="0">
+                        <a:rPr sz="1030" b="0">
                           <a:solidFill>
                             <a:srgbClr val="1C2119"/>
                           </a:solidFill>
@@ -4723,13 +4898,13 @@
                     <a:p>
                       <a:pPr algn="ctr"/>
                       <a:r>
-                        <a:rPr sz="1080" b="0">
+                        <a:rPr sz="1030" b="0">
                           <a:solidFill>
                             <a:srgbClr val="1C2119"/>
                           </a:solidFill>
                           <a:latin typeface="Calibri"/>
                         </a:rPr>
-                        <a:t>-0.182</a:t>
+                        <a:t>-0.538</a:t>
                       </a:r>
                     </a:p>
                   </a:txBody>
@@ -4746,13 +4921,13 @@
                     <a:p>
                       <a:pPr algn="ctr"/>
                       <a:r>
-                        <a:rPr sz="1080" b="0">
+                        <a:rPr sz="1030" b="0">
                           <a:solidFill>
                             <a:srgbClr val="1C2119"/>
                           </a:solidFill>
                           <a:latin typeface="Calibri"/>
                         </a:rPr>
-                        <a:t>0.366</a:t>
+                        <a:t>0.534</a:t>
                       </a:r>
                     </a:p>
                   </a:txBody>
@@ -4762,8 +4937,31 @@
                     </a:solidFill>
                   </a:tcPr>
                 </a:tc>
+                <a:tc>
+                  <a:txBody>
+                    <a:bodyPr/>
+                    <a:lstStyle/>
+                    <a:p>
+                      <a:pPr algn="ctr"/>
+                      <a:r>
+                        <a:rPr sz="1030" b="0">
+                          <a:solidFill>
+                            <a:srgbClr val="1C2119"/>
+                          </a:solidFill>
+                          <a:latin typeface="Calibri"/>
+                        </a:rPr>
+                        <a:t>955</a:t>
+                      </a:r>
+                    </a:p>
+                  </a:txBody>
+                  <a:tcPr marT="38100" marB="38100">
+                    <a:solidFill>
+                      <a:srgbClr val="F5F6F1"/>
+                    </a:solidFill>
+                  </a:tcPr>
+                </a:tc>
               </a:tr>
-              <a:tr h="293914">
+              <a:tr h="314960">
                 <a:tc>
                   <a:txBody>
                     <a:bodyPr/>
@@ -4771,13 +4969,13 @@
                     <a:p>
                       <a:pPr algn="l"/>
                       <a:r>
-                        <a:rPr sz="1080" b="1">
+                        <a:rPr sz="1030" b="1">
                           <a:solidFill>
                             <a:srgbClr val="1C2119"/>
                           </a:solidFill>
                           <a:latin typeface="Calibri"/>
                         </a:rPr>
-                        <a:t>px049_grass_nat</a:t>
+                        <a:t>g053_trees_be</a:t>
                       </a:r>
                     </a:p>
                   </a:txBody>
@@ -4794,13 +4992,13 @@
                     <a:p>
                       <a:pPr algn="ctr"/>
                       <a:r>
-                        <a:rPr sz="1080" b="0">
+                        <a:rPr sz="1030" b="0">
                           <a:solidFill>
                             <a:srgbClr val="1C2119"/>
                           </a:solidFill>
                           <a:latin typeface="Calibri"/>
                         </a:rPr>
-                        <a:t>GRASS_NAT</a:t>
+                        <a:t>TREES-BE</a:t>
                       </a:r>
                     </a:p>
                   </a:txBody>
@@ -4817,13 +5015,13 @@
                     <a:p>
                       <a:pPr algn="ctr"/>
                       <a:r>
-                        <a:rPr sz="1080" b="0">
+                        <a:rPr sz="1030" b="0">
                           <a:solidFill>
                             <a:srgbClr val="1C2119"/>
                           </a:solidFill>
                           <a:latin typeface="Calibri"/>
                         </a:rPr>
-                        <a:t>Great Plains</a:t>
+                        <a:t>Other</a:t>
                       </a:r>
                     </a:p>
                   </a:txBody>
@@ -4840,13 +5038,13 @@
                     <a:p>
                       <a:pPr algn="ctr"/>
                       <a:r>
-                        <a:rPr sz="1080" b="0">
+                        <a:rPr sz="1030" b="0">
                           <a:solidFill>
                             <a:srgbClr val="1C2119"/>
                           </a:solidFill>
                           <a:latin typeface="Calibri"/>
                         </a:rPr>
-                        <a:t>-0.168</a:t>
+                        <a:t>-0.428</a:t>
                       </a:r>
                     </a:p>
                   </a:txBody>
@@ -4863,13 +5061,13 @@
                     <a:p>
                       <a:pPr algn="ctr"/>
                       <a:r>
-                        <a:rPr sz="1080" b="0">
+                        <a:rPr sz="1030" b="0">
                           <a:solidFill>
                             <a:srgbClr val="1C2119"/>
                           </a:solidFill>
                           <a:latin typeface="Calibri"/>
                         </a:rPr>
-                        <a:t>0.437</a:t>
+                        <a:t>-0.043</a:t>
                       </a:r>
                     </a:p>
                   </a:txBody>
@@ -4879,8 +5077,31 @@
                     </a:solidFill>
                   </a:tcPr>
                 </a:tc>
+                <a:tc>
+                  <a:txBody>
+                    <a:bodyPr/>
+                    <a:lstStyle/>
+                    <a:p>
+                      <a:pPr algn="ctr"/>
+                      <a:r>
+                        <a:rPr sz="1030" b="0">
+                          <a:solidFill>
+                            <a:srgbClr val="1C2119"/>
+                          </a:solidFill>
+                          <a:latin typeface="Calibri"/>
+                        </a:rPr>
+                        <a:t>328</a:t>
+                      </a:r>
+                    </a:p>
+                  </a:txBody>
+                  <a:tcPr marT="38100" marB="38100">
+                    <a:solidFill>
+                      <a:srgbClr val="FFFFFF"/>
+                    </a:solidFill>
+                  </a:tcPr>
+                </a:tc>
               </a:tr>
-              <a:tr h="293916">
+              <a:tr h="314960">
                 <a:tc>
                   <a:txBody>
                     <a:bodyPr/>
@@ -4888,13 +5109,13 @@
                     <a:p>
                       <a:pPr algn="l"/>
                       <a:r>
-                        <a:rPr sz="1080" b="1">
+                        <a:rPr sz="1030" b="1">
                           <a:solidFill>
                             <a:srgbClr val="1C2119"/>
                           </a:solidFill>
                           <a:latin typeface="Calibri"/>
                         </a:rPr>
-                        <a:t>px035_shrubs_nd</a:t>
+                        <a:t>g023_grass_nat</a:t>
                       </a:r>
                     </a:p>
                   </a:txBody>
@@ -4911,13 +5132,13 @@
                     <a:p>
                       <a:pPr algn="ctr"/>
                       <a:r>
-                        <a:rPr sz="1080" b="0">
+                        <a:rPr sz="1030" b="0">
                           <a:solidFill>
                             <a:srgbClr val="1C2119"/>
                           </a:solidFill>
                           <a:latin typeface="Calibri"/>
                         </a:rPr>
-                        <a:t>SHRUBS_ND</a:t>
+                        <a:t>GRASS-NAT</a:t>
                       </a:r>
                     </a:p>
                   </a:txBody>
@@ -4934,12 +5155,292 @@
                     <a:p>
                       <a:pPr algn="ctr"/>
                       <a:r>
-                        <a:rPr sz="1080" b="0">
+                        <a:rPr sz="1030" b="0">
                           <a:solidFill>
                             <a:srgbClr val="1C2119"/>
                           </a:solidFill>
                           <a:latin typeface="Calibri"/>
                         </a:rPr>
+                        <a:t>Canada</a:t>
+                      </a:r>
+                    </a:p>
+                  </a:txBody>
+                  <a:tcPr marT="38100" marB="38100">
+                    <a:solidFill>
+                      <a:srgbClr val="F5F6F1"/>
+                    </a:solidFill>
+                  </a:tcPr>
+                </a:tc>
+                <a:tc>
+                  <a:txBody>
+                    <a:bodyPr/>
+                    <a:lstStyle/>
+                    <a:p>
+                      <a:pPr algn="ctr"/>
+                      <a:r>
+                        <a:rPr sz="1030" b="0">
+                          <a:solidFill>
+                            <a:srgbClr val="1C2119"/>
+                          </a:solidFill>
+                          <a:latin typeface="Calibri"/>
+                        </a:rPr>
+                        <a:t>-0.280</a:t>
+                      </a:r>
+                    </a:p>
+                  </a:txBody>
+                  <a:tcPr marT="38100" marB="38100">
+                    <a:solidFill>
+                      <a:srgbClr val="F5F6F1"/>
+                    </a:solidFill>
+                  </a:tcPr>
+                </a:tc>
+                <a:tc>
+                  <a:txBody>
+                    <a:bodyPr/>
+                    <a:lstStyle/>
+                    <a:p>
+                      <a:pPr algn="ctr"/>
+                      <a:r>
+                        <a:rPr sz="1030" b="0">
+                          <a:solidFill>
+                            <a:srgbClr val="1C2119"/>
+                          </a:solidFill>
+                          <a:latin typeface="Calibri"/>
+                        </a:rPr>
+                        <a:t>0.682</a:t>
+                      </a:r>
+                    </a:p>
+                  </a:txBody>
+                  <a:tcPr marT="38100" marB="38100">
+                    <a:solidFill>
+                      <a:srgbClr val="F5F6F1"/>
+                    </a:solidFill>
+                  </a:tcPr>
+                </a:tc>
+                <a:tc>
+                  <a:txBody>
+                    <a:bodyPr/>
+                    <a:lstStyle/>
+                    <a:p>
+                      <a:pPr algn="ctr"/>
+                      <a:r>
+                        <a:rPr sz="1030" b="0">
+                          <a:solidFill>
+                            <a:srgbClr val="1C2119"/>
+                          </a:solidFill>
+                          <a:latin typeface="Calibri"/>
+                        </a:rPr>
+                        <a:t>504</a:t>
+                      </a:r>
+                    </a:p>
+                  </a:txBody>
+                  <a:tcPr marT="38100" marB="38100">
+                    <a:solidFill>
+                      <a:srgbClr val="F5F6F1"/>
+                    </a:solidFill>
+                  </a:tcPr>
+                </a:tc>
+              </a:tr>
+              <a:tr h="314960">
+                <a:tc>
+                  <a:txBody>
+                    <a:bodyPr/>
+                    <a:lstStyle/>
+                    <a:p>
+                      <a:pPr algn="l"/>
+                      <a:r>
+                        <a:rPr sz="1030" b="1">
+                          <a:solidFill>
+                            <a:srgbClr val="1C2119"/>
+                          </a:solidFill>
+                          <a:latin typeface="Calibri"/>
+                        </a:rPr>
+                        <a:t>g015_trees_nd</a:t>
+                      </a:r>
+                    </a:p>
+                  </a:txBody>
+                  <a:tcPr marT="38100" marB="38100">
+                    <a:solidFill>
+                      <a:srgbClr val="FFFFFF"/>
+                    </a:solidFill>
+                  </a:tcPr>
+                </a:tc>
+                <a:tc>
+                  <a:txBody>
+                    <a:bodyPr/>
+                    <a:lstStyle/>
+                    <a:p>
+                      <a:pPr algn="ctr"/>
+                      <a:r>
+                        <a:rPr sz="1030" b="0">
+                          <a:solidFill>
+                            <a:srgbClr val="1C2119"/>
+                          </a:solidFill>
+                          <a:latin typeface="Calibri"/>
+                        </a:rPr>
+                        <a:t>TREES-ND</a:t>
+                      </a:r>
+                    </a:p>
+                  </a:txBody>
+                  <a:tcPr marT="38100" marB="38100">
+                    <a:solidFill>
+                      <a:srgbClr val="FFFFFF"/>
+                    </a:solidFill>
+                  </a:tcPr>
+                </a:tc>
+                <a:tc>
+                  <a:txBody>
+                    <a:bodyPr/>
+                    <a:lstStyle/>
+                    <a:p>
+                      <a:pPr algn="ctr"/>
+                      <a:r>
+                        <a:rPr sz="1030" b="0">
+                          <a:solidFill>
+                            <a:srgbClr val="1C2119"/>
+                          </a:solidFill>
+                          <a:latin typeface="Calibri"/>
+                        </a:rPr>
+                        <a:t>Siberia / Boreal Eurasia</a:t>
+                      </a:r>
+                    </a:p>
+                  </a:txBody>
+                  <a:tcPr marT="38100" marB="38100">
+                    <a:solidFill>
+                      <a:srgbClr val="FFFFFF"/>
+                    </a:solidFill>
+                  </a:tcPr>
+                </a:tc>
+                <a:tc>
+                  <a:txBody>
+                    <a:bodyPr/>
+                    <a:lstStyle/>
+                    <a:p>
+                      <a:pPr algn="ctr"/>
+                      <a:r>
+                        <a:rPr sz="1030" b="0">
+                          <a:solidFill>
+                            <a:srgbClr val="1C2119"/>
+                          </a:solidFill>
+                          <a:latin typeface="Calibri"/>
+                        </a:rPr>
+                        <a:t>-0.246</a:t>
+                      </a:r>
+                    </a:p>
+                  </a:txBody>
+                  <a:tcPr marT="38100" marB="38100">
+                    <a:solidFill>
+                      <a:srgbClr val="FFFFFF"/>
+                    </a:solidFill>
+                  </a:tcPr>
+                </a:tc>
+                <a:tc>
+                  <a:txBody>
+                    <a:bodyPr/>
+                    <a:lstStyle/>
+                    <a:p>
+                      <a:pPr algn="ctr"/>
+                      <a:r>
+                        <a:rPr sz="1030" b="0">
+                          <a:solidFill>
+                            <a:srgbClr val="1C2119"/>
+                          </a:solidFill>
+                          <a:latin typeface="Calibri"/>
+                        </a:rPr>
+                        <a:t>0.849</a:t>
+                      </a:r>
+                    </a:p>
+                  </a:txBody>
+                  <a:tcPr marT="38100" marB="38100">
+                    <a:solidFill>
+                      <a:srgbClr val="FFFFFF"/>
+                    </a:solidFill>
+                  </a:tcPr>
+                </a:tc>
+                <a:tc>
+                  <a:txBody>
+                    <a:bodyPr/>
+                    <a:lstStyle/>
+                    <a:p>
+                      <a:pPr algn="ctr"/>
+                      <a:r>
+                        <a:rPr sz="1030" b="0">
+                          <a:solidFill>
+                            <a:srgbClr val="1C2119"/>
+                          </a:solidFill>
+                          <a:latin typeface="Calibri"/>
+                        </a:rPr>
+                        <a:t>467</a:t>
+                      </a:r>
+                    </a:p>
+                  </a:txBody>
+                  <a:tcPr marT="38100" marB="38100">
+                    <a:solidFill>
+                      <a:srgbClr val="FFFFFF"/>
+                    </a:solidFill>
+                  </a:tcPr>
+                </a:tc>
+              </a:tr>
+              <a:tr h="314960">
+                <a:tc>
+                  <a:txBody>
+                    <a:bodyPr/>
+                    <a:lstStyle/>
+                    <a:p>
+                      <a:pPr algn="l"/>
+                      <a:r>
+                        <a:rPr sz="1030" b="1">
+                          <a:solidFill>
+                            <a:srgbClr val="1C2119"/>
+                          </a:solidFill>
+                          <a:latin typeface="Calibri"/>
+                        </a:rPr>
+                        <a:t>g043_grass_man</a:t>
+                      </a:r>
+                    </a:p>
+                  </a:txBody>
+                  <a:tcPr marT="38100" marB="38100">
+                    <a:solidFill>
+                      <a:srgbClr val="F5F6F1"/>
+                    </a:solidFill>
+                  </a:tcPr>
+                </a:tc>
+                <a:tc>
+                  <a:txBody>
+                    <a:bodyPr/>
+                    <a:lstStyle/>
+                    <a:p>
+                      <a:pPr algn="ctr"/>
+                      <a:r>
+                        <a:rPr sz="1030" b="0">
+                          <a:solidFill>
+                            <a:srgbClr val="1C2119"/>
+                          </a:solidFill>
+                          <a:latin typeface="Calibri"/>
+                        </a:rPr>
+                        <a:t>GRASS-MAN</a:t>
+                      </a:r>
+                    </a:p>
+                  </a:txBody>
+                  <a:tcPr marT="38100" marB="38100">
+                    <a:solidFill>
+                      <a:srgbClr val="F5F6F1"/>
+                    </a:solidFill>
+                  </a:tcPr>
+                </a:tc>
+                <a:tc>
+                  <a:txBody>
+                    <a:bodyPr/>
+                    <a:lstStyle/>
+                    <a:p>
+                      <a:pPr algn="ctr"/>
+                      <a:r>
+                        <a:rPr sz="1030" b="0">
+                          <a:solidFill>
+                            <a:srgbClr val="1C2119"/>
+                          </a:solidFill>
+                          <a:latin typeface="Calibri"/>
+                        </a:rPr>
                         <a:t>Other</a:t>
                       </a:r>
                     </a:p>
@@ -4957,13 +5458,13 @@
                     <a:p>
                       <a:pPr algn="ctr"/>
                       <a:r>
-                        <a:rPr sz="1080" b="0">
+                        <a:rPr sz="1030" b="0">
                           <a:solidFill>
                             <a:srgbClr val="1C2119"/>
                           </a:solidFill>
                           <a:latin typeface="Calibri"/>
                         </a:rPr>
-                        <a:t>-0.128</a:t>
+                        <a:t>-0.171</a:t>
                       </a:r>
                     </a:p>
                   </a:txBody>
@@ -4980,13 +5481,36 @@
                     <a:p>
                       <a:pPr algn="ctr"/>
                       <a:r>
-                        <a:rPr sz="1080" b="0">
+                        <a:rPr sz="1030" b="0">
                           <a:solidFill>
                             <a:srgbClr val="1C2119"/>
                           </a:solidFill>
                           <a:latin typeface="Calibri"/>
                         </a:rPr>
-                        <a:t>0.534</a:t>
+                        <a:t>0.227</a:t>
+                      </a:r>
+                    </a:p>
+                  </a:txBody>
+                  <a:tcPr marT="38100" marB="38100">
+                    <a:solidFill>
+                      <a:srgbClr val="F5F6F1"/>
+                    </a:solidFill>
+                  </a:tcPr>
+                </a:tc>
+                <a:tc>
+                  <a:txBody>
+                    <a:bodyPr/>
+                    <a:lstStyle/>
+                    <a:p>
+                      <a:pPr algn="ctr"/>
+                      <a:r>
+                        <a:rPr sz="1030" b="0">
+                          <a:solidFill>
+                            <a:srgbClr val="1C2119"/>
+                          </a:solidFill>
+                          <a:latin typeface="Calibri"/>
+                        </a:rPr>
+                        <a:t>704</a:t>
                       </a:r>
                     </a:p>
                   </a:txBody>
@@ -5162,7 +5686,7 @@
                 </a:solidFill>
                 <a:latin typeface="Calibri"/>
               </a:rPr>
-              <a:t>All 6 ERA5 failures are already-marginal SHRUBS_ND/SHRUBS_BD/GRASS_NAT pixels — 2 were already known low-signal cases; 4 are new, consistent with noisier ERA5 precipitation/wind on fragile pixels.</a:t>
+              <a:t>13/68 pixels negative, concentrated in tropical (persistent cloud) and remote high-latitude regions — Amazon/Tropical S. America is the single weakest region (mean R²&lt;0).</a:t>
             </a:r>
           </a:p>
         </p:txBody>
@@ -5439,7 +5963,7 @@
                 </a:solidFill>
                 <a:latin typeface="Calibri"/>
               </a:rPr>
-              <a:t>Experiment 1 (gridMET, 32 pixels): median R²=0.865, 22/32 pixels ≥ 0.8.</a:t>
+              <a:t>Part 1 (gridMET, 32 CONUS pixels): median R²=0.865, 22/32 pixels ≥ 0.8.</a:t>
             </a:r>
           </a:p>
           <a:p>
@@ -5467,7 +5991,7 @@
                 </a:solidFill>
                 <a:latin typeface="Calibri"/>
               </a:rPr>
-              <a:t>Experiment 2 (cloud ERA5, 70 pixels, matched context): median R²=0.890, 46/70 pixels ≥ 0.8; vs. gridMET on the same pixels: 31/70 ERA5-better, 39/70 gridMET-better.</a:t>
+              <a:t>Part 2 (ERA5 + MODIS, 68 global non-CONUS pixels): median R²=0.353, only 4/68 pixels ≥ 0.8, 13/68 negative.</a:t>
             </a:r>
           </a:p>
         </p:txBody>
@@ -5557,7 +6081,7 @@
                 </a:solidFill>
                 <a:latin typeface="Calibri"/>
               </a:rPr>
-              <a:t>Strong zero-shot generalization is not an artifact of 3 hand-picked pixels or of gridMET specifically — it extends to a larger, diverse pool and to an independent meteorological source.</a:t>
+              <a:t>The strong zero-shot generalization repeatedly seen within CONUS does NOT transfer uniformly to a global, more diverse pixel pool — this is the first result in this project to show a real ceiling on zero-shot Chronos-2's LAI generalization.</a:t>
             </a:r>
           </a:p>
           <a:p>
@@ -5585,7 +6109,7 @@
                 </a:solidFill>
                 <a:latin typeface="Calibri"/>
               </a:rPr>
-              <a:t>gridMET and cloud-ERA5 are not interchangeable at the level of individual marginal pixels: ERA5 has a longer negative-R² tail, concentrated in already-fragile shrub/grassland pixels — do not read this as "ERA5 is worse than gridMET" in general; medians differ by only ~0.015 and ERA5 wins on 31/70 pixels.</a:t>
+              <a:t>The gap is not primarily a context-length artifact (r=0.16 within Part 2); genuine regional/ecological difficulty — especially tropical persistent-cloud and remote high-latitude pixels — is the larger factor.</a:t>
             </a:r>
           </a:p>
         </p:txBody>
@@ -5624,7 +6148,7 @@
                 </a:solidFill>
                 <a:latin typeface="Calibri"/>
               </a:rPr>
-              <a:t>NEXT STEPS</a:t>
+              <a:t>HYPOTHESIS / NEXT STEPS</a:t>
             </a:r>
           </a:p>
         </p:txBody>
@@ -5675,35 +6199,7 @@
                 </a:solidFill>
                 <a:latin typeface="Calibri"/>
               </a:rPr>
-              <a:t>Investigate the ERA5 precipitation/wind de-accumulation discrepancy directly (isolate which variable drives the 4 newly-negative pixels).</a:t>
-            </a:r>
-          </a:p>
-          <a:p>
-            <a:pPr>
-              <a:lnSpc>
-                <a:spcPct val="106000"/>
-              </a:lnSpc>
-              <a:spcAft>
-                <a:spcPts val="700"/>
-              </a:spcAft>
-            </a:pPr>
-            <a:r>
-              <a:rPr sz="1350">
-                <a:solidFill>
-                  <a:srgbClr val="5C6355"/>
-                </a:solidFill>
-                <a:latin typeface="Calibri"/>
-              </a:rPr>
-              <a:t>▪  </a:t>
-            </a:r>
-            <a:r>
-              <a:rPr sz="1350">
-                <a:solidFill>
-                  <a:srgbClr val="1C2119"/>
-                </a:solidFill>
-                <a:latin typeface="Calibri"/>
-              </a:rPr>
-              <a:t>Extend the matched-context comparison to non-CONUS pixels once a global LAI source is available.</a:t>
+              <a:t>Not yet distinguished: Chronos-2's own generalization limits vs. noisier/sparser MODIS LAI vs. genuinely different (e.g. tropical) vegetation dynamics — disentangling needs a CONUS pixel re-scored against MODIS LAI as a controlled comparison.</a:t>
             </a:r>
           </a:p>
         </p:txBody>
@@ -5869,7 +6365,7 @@
                 </a:solidFill>
                 <a:latin typeface="Calibri"/>
               </a:rPr>
-              <a:t>Two independent large-scale tests point the same way: zero-shot Chronos-2's LAI generalization is robust to pixel choice and, largely, to the meteorological data source.</a:t>
+              <a:t>Two integrated experiments: strong, robust generalization within CONUS across two climate sources; a real, unexplained drop when tested globally — an open question, not a closed one.</a:t>
             </a:r>
           </a:p>
         </p:txBody>
@@ -6088,11 +6584,11 @@
                 <a:spcPct val="106000"/>
               </a:lnSpc>
               <a:spcAft>
-                <a:spcPts val="1400"/>
+                <a:spcPts val="1300"/>
               </a:spcAft>
             </a:pPr>
             <a:r>
-              <a:rPr sz="1700">
+              <a:rPr sz="1650">
                 <a:solidFill>
                   <a:srgbClr val="2F6F5E"/>
                 </a:solidFill>
@@ -6101,7 +6597,7 @@
               <a:t>▪  </a:t>
             </a:r>
             <a:r>
-              <a:rPr sz="1700">
+              <a:rPr sz="1650">
                 <a:solidFill>
                   <a:srgbClr val="1C2119"/>
                 </a:solidFill>
@@ -6116,11 +6612,11 @@
                 <a:spcPct val="106000"/>
               </a:lnSpc>
               <a:spcAft>
-                <a:spcPts val="1400"/>
+                <a:spcPts val="1300"/>
               </a:spcAft>
             </a:pPr>
             <a:r>
-              <a:rPr sz="1700">
+              <a:rPr sz="1650">
                 <a:solidFill>
                   <a:srgbClr val="2F6F5E"/>
                 </a:solidFill>
@@ -6129,13 +6625,13 @@
               <a:t>▪  </a:t>
             </a:r>
             <a:r>
-              <a:rPr sz="1700">
+              <a:rPr sz="1650">
                 <a:solidFill>
                   <a:srgbClr val="1C2119"/>
                 </a:solidFill>
                 <a:latin typeface="Calibri"/>
               </a:rPr>
-              <a:t>Experiment 1 asks: does the result hold across a larger, independently-selected, diverse pixel pool — not just 3 favorable locations?</a:t>
+              <a:t>Part 1 asks: does the result hold across a larger, independently-selected, diverse CONUS pixel pool — not just 3 favorable locations?</a:t>
             </a:r>
           </a:p>
           <a:p>
@@ -6144,11 +6640,11 @@
                 <a:spcPct val="106000"/>
               </a:lnSpc>
               <a:spcAft>
-                <a:spcPts val="1400"/>
+                <a:spcPts val="1300"/>
               </a:spcAft>
             </a:pPr>
             <a:r>
-              <a:rPr sz="1700">
+              <a:rPr sz="1650">
                 <a:solidFill>
                   <a:srgbClr val="2F6F5E"/>
                 </a:solidFill>
@@ -6157,13 +6653,13 @@
               <a:t>▪  </a:t>
             </a:r>
             <a:r>
-              <a:rPr sz="1700">
+              <a:rPr sz="1650">
                 <a:solidFill>
                   <a:srgbClr val="1C2119"/>
                 </a:solidFill>
                 <a:latin typeface="Calibri"/>
               </a:rPr>
-              <a:t>Experiment 2 asks a second, independent question: is the result specific to gridMET, or does it hold with a different meteorological reanalysis product (ERA5) under an identical protocol?</a:t>
+              <a:t>Part 2 asks a harder, independent question: does the result hold at all OUTSIDE the U.S., on a genuinely global pixel pool, using a global climate source (ERA5) and a global LAI product (MODIS) instead of gridMET/HiQ-LAI (both CONUS-only)?</a:t>
             </a:r>
           </a:p>
         </p:txBody>
@@ -6287,7 +6783,7 @@
                 </a:solidFill>
                 <a:latin typeface="Calibri"/>
               </a:rPr>
-              <a:t>gridMET: purity-filtered CONUS subset</a:t>
+              <a:t>Part 1: purity-filtered CONUS subset</a:t>
             </a:r>
           </a:p>
         </p:txBody>
@@ -6411,7 +6907,7 @@
                 </a:solidFill>
                 <a:latin typeface="Calibri"/>
               </a:rPr>
-              <a:t>ERA5: full CONUS pool, matched context</a:t>
+              <a:t>Part 2: non-CONUS global pixels, 14 regions</a:t>
             </a:r>
           </a:p>
         </p:txBody>
@@ -6535,7 +7031,7 @@
                 </a:solidFill>
                 <a:latin typeface="Calibri"/>
               </a:rPr>
-              <a:t>no training/fine-tuning in either study</a:t>
+              <a:t>no training/fine-tuning in either part</a:t>
             </a:r>
           </a:p>
         </p:txBody>
@@ -6701,7 +7197,7 @@
                 </a:solidFill>
                 <a:latin typeface="Calibri"/>
               </a:rPr>
-              <a:t>Both experiments reuse the same pixel-selection pipeline and evaluation protocol — the only thing that changes is what's being tested.</a:t>
+              <a:t>Part 1 tests robustness to pixel choice within CONUS; Part 2 tests robustness to geography, climate source, and LAI source all at once.</a:t>
             </a:r>
           </a:p>
         </p:txBody>
@@ -9285,7 +9781,7 @@
                 </a:solidFill>
                 <a:latin typeface="Calibri"/>
               </a:rPr>
-              <a:t>EXPERIMENT 2 — LARGE-SCALE CLOUD ERA5</a:t>
+              <a:t>PART 2 — NON-CONUS GLOBAL EXPERIMENT</a:t>
             </a:r>
           </a:p>
         </p:txBody>
@@ -9324,7 +9820,7 @@
                 </a:solidFill>
                 <a:latin typeface="Calibri"/>
               </a:rPr>
-              <a:t>Experiment 2: Google ARCO-ERA5 Dataset &amp; Pipeline</a:t>
+              <a:t>Part 2: Global ERA5 + MODIS Dataset &amp; Pipeline</a:t>
             </a:r>
           </a:p>
         </p:txBody>
@@ -9421,7 +9917,7 @@
         <p:spPr>
           <a:xfrm>
             <a:off x="502920" y="1143000"/>
-            <a:ext cx="10789920" cy="777240"/>
+            <a:ext cx="10789920" cy="548640"/>
           </a:xfrm>
           <a:prstGeom prst="rect">
             <a:avLst/>
@@ -9446,7 +9942,7 @@
                 </a:solidFill>
                 <a:latin typeface="Calibri"/>
               </a:rPr>
-              <a:t>Source: </a:t>
+              <a:t>Climate: </a:t>
             </a:r>
           </a:p>
           <a:p>
@@ -9462,7 +9958,7 @@
                 </a:solidFill>
                 <a:latin typeface="Calibri"/>
               </a:rPr>
-              <a:t>gs://gcp-public-data-arco-era5/ar/full_37-1h-0p25deg-chunk-1.zarr-v3</a:t>
+              <a:t>Google ARCO-ERA5</a:t>
             </a:r>
           </a:p>
           <a:p>
@@ -9472,13 +9968,61 @@
               </a:lnSpc>
             </a:pPr>
             <a:r>
-              <a:rPr sz="1400" b="0" i="0">
+              <a:rPr sz="1350" b="0" i="0">
                 <a:solidFill>
                   <a:srgbClr val="5C6355"/>
                 </a:solidFill>
                 <a:latin typeface="Calibri"/>
               </a:rPr>
-              <a:t>  — Google's Analysis-Ready, Cloud-Optimized ERA5 mirror, Zarr format, anonymous GCS read access, true ERA5 reanalysis (not ERA5-Land), 0.25° grid, hourly, 1900–2026 (used 2000–2022).</a:t>
+              <a:t> (cloud Zarr, 0.25°, same pipeline validated for the CONUS study — see next slide).  </a:t>
+            </a:r>
+          </a:p>
+          <a:p>
+            <a:pPr algn="l">
+              <a:lnSpc>
+                <a:spcPct val="100000"/>
+              </a:lnSpc>
+            </a:pPr>
+            <a:r>
+              <a:rPr sz="1400" b="1" i="0">
+                <a:solidFill>
+                  <a:srgbClr val="5C6355"/>
+                </a:solidFill>
+                <a:latin typeface="Calibri"/>
+              </a:rPr>
+              <a:t>LAI: </a:t>
+            </a:r>
+          </a:p>
+          <a:p>
+            <a:pPr algn="l">
+              <a:lnSpc>
+                <a:spcPct val="100000"/>
+              </a:lnSpc>
+            </a:pPr>
+            <a:r>
+              <a:rPr sz="1350" b="1" i="0">
+                <a:solidFill>
+                  <a:srgbClr val="1C2119"/>
+                </a:solidFill>
+                <a:latin typeface="Calibri"/>
+              </a:rPr>
+              <a:t>MODIS MOD15A2H.061</a:t>
+            </a:r>
+          </a:p>
+          <a:p>
+            <a:pPr algn="l">
+              <a:lnSpc>
+                <a:spcPct val="100000"/>
+              </a:lnSpc>
+            </a:pPr>
+            <a:r>
+              <a:rPr sz="1350" b="0" i="0">
+                <a:solidFill>
+                  <a:srgbClr val="5C6355"/>
+                </a:solidFill>
+                <a:latin typeface="Calibri"/>
+              </a:rPr>
+              <a:t> (NEW — gridMET/HiQ-LAI is CONUS-only), fetched via NASA's AppEEARS point API.</a:t>
             </a:r>
           </a:p>
         </p:txBody>
@@ -9492,8 +10036,8 @@
           <p:nvPr/>
         </p:nvGraphicFramePr>
         <p:xfrm>
-          <a:off x="502920" y="2011680"/>
-          <a:ext cx="11185854" cy="2880360"/>
+          <a:off x="502920" y="1783080"/>
+          <a:ext cx="11185854" cy="2148840"/>
         </p:xfrm>
         <a:graphic>
           <a:graphicData uri="http://schemas.openxmlformats.org/drawingml/2006/table">
@@ -9506,7 +10050,7 @@
                 <a:gridCol w="4698059"/>
                 <a:gridCol w="3355756"/>
               </a:tblGrid>
-              <a:tr h="360045">
+              <a:tr h="306977">
                 <a:tc>
                   <a:txBody>
                     <a:bodyPr/>
@@ -9514,7 +10058,7 @@
                     <a:p>
                       <a:pPr algn="l"/>
                       <a:r>
-                        <a:rPr sz="1250" b="1">
+                        <a:rPr sz="1200" b="1">
                           <a:solidFill>
                             <a:srgbClr val="FFFFFF"/>
                           </a:solidFill>
@@ -9537,7 +10081,7 @@
                     <a:p>
                       <a:pPr algn="ctr"/>
                       <a:r>
-                        <a:rPr sz="1250" b="1">
+                        <a:rPr sz="1200" b="1">
                           <a:solidFill>
                             <a:srgbClr val="FFFFFF"/>
                           </a:solidFill>
@@ -9560,7 +10104,7 @@
                     <a:p>
                       <a:pPr algn="ctr"/>
                       <a:r>
-                        <a:rPr sz="1250" b="1">
+                        <a:rPr sz="1200" b="1">
                           <a:solidFill>
                             <a:srgbClr val="FFFFFF"/>
                           </a:solidFill>
@@ -9577,7 +10121,7 @@
                   </a:tcPr>
                 </a:tc>
               </a:tr>
-              <a:tr h="360045">
+              <a:tr h="306977">
                 <a:tc>
                   <a:txBody>
                     <a:bodyPr/>
@@ -9585,7 +10129,7 @@
                     <a:p>
                       <a:pPr algn="l"/>
                       <a:r>
-                        <a:rPr sz="1180" b="1">
+                        <a:rPr sz="1130" b="1">
                           <a:solidFill>
                             <a:srgbClr val="1C2119"/>
                           </a:solidFill>
@@ -9608,7 +10152,7 @@
                     <a:p>
                       <a:pPr algn="ctr"/>
                       <a:r>
-                        <a:rPr sz="1180" b="0">
+                        <a:rPr sz="1130" b="0">
                           <a:solidFill>
                             <a:srgbClr val="1C2119"/>
                           </a:solidFill>
@@ -9631,7 +10175,7 @@
                     <a:p>
                       <a:pPr algn="ctr"/>
                       <a:r>
-                        <a:rPr sz="1180" b="0">
+                        <a:rPr sz="1130" b="0">
                           <a:solidFill>
                             <a:srgbClr val="1C2119"/>
                           </a:solidFill>
@@ -9648,7 +10192,7 @@
                   </a:tcPr>
                 </a:tc>
               </a:tr>
-              <a:tr h="360045">
+              <a:tr h="306977">
                 <a:tc>
                   <a:txBody>
                     <a:bodyPr/>
@@ -9656,7 +10200,7 @@
                     <a:p>
                       <a:pPr algn="l"/>
                       <a:r>
-                        <a:rPr sz="1180" b="1">
+                        <a:rPr sz="1130" b="1">
                           <a:solidFill>
                             <a:srgbClr val="1C2119"/>
                           </a:solidFill>
@@ -9679,7 +10223,7 @@
                     <a:p>
                       <a:pPr algn="ctr"/>
                       <a:r>
-                        <a:rPr sz="1180" b="0">
+                        <a:rPr sz="1130" b="0">
                           <a:solidFill>
                             <a:srgbClr val="1C2119"/>
                           </a:solidFill>
@@ -9702,7 +10246,7 @@
                     <a:p>
                       <a:pPr algn="ctr"/>
                       <a:r>
-                        <a:rPr sz="1180" b="0">
+                        <a:rPr sz="1130" b="0">
                           <a:solidFill>
                             <a:srgbClr val="1C2119"/>
                           </a:solidFill>
@@ -9719,7 +10263,7 @@
                   </a:tcPr>
                 </a:tc>
               </a:tr>
-              <a:tr h="360045">
+              <a:tr h="306977">
                 <a:tc>
                   <a:txBody>
                     <a:bodyPr/>
@@ -9727,7 +10271,7 @@
                     <a:p>
                       <a:pPr algn="l"/>
                       <a:r>
-                        <a:rPr sz="1180" b="1">
+                        <a:rPr sz="1130" b="1">
                           <a:solidFill>
                             <a:srgbClr val="1C2119"/>
                           </a:solidFill>
@@ -9750,7 +10294,7 @@
                     <a:p>
                       <a:pPr algn="ctr"/>
                       <a:r>
-                        <a:rPr sz="1180" b="0">
+                        <a:rPr sz="1130" b="0">
                           <a:solidFill>
                             <a:srgbClr val="1C2119"/>
                           </a:solidFill>
@@ -9773,7 +10317,7 @@
                     <a:p>
                       <a:pPr algn="ctr"/>
                       <a:r>
-                        <a:rPr sz="1180" b="0">
+                        <a:rPr sz="1130" b="0">
                           <a:solidFill>
                             <a:srgbClr val="1C2119"/>
                           </a:solidFill>
@@ -9790,7 +10334,7 @@
                   </a:tcPr>
                 </a:tc>
               </a:tr>
-              <a:tr h="360045">
+              <a:tr h="306977">
                 <a:tc>
                   <a:txBody>
                     <a:bodyPr/>
@@ -9798,7 +10342,7 @@
                     <a:p>
                       <a:pPr algn="l"/>
                       <a:r>
-                        <a:rPr sz="1180" b="1">
+                        <a:rPr sz="1130" b="1">
                           <a:solidFill>
                             <a:srgbClr val="1C2119"/>
                           </a:solidFill>
@@ -9821,7 +10365,7 @@
                     <a:p>
                       <a:pPr algn="ctr"/>
                       <a:r>
-                        <a:rPr sz="1180" b="0">
+                        <a:rPr sz="1130" b="0">
                           <a:solidFill>
                             <a:srgbClr val="1C2119"/>
                           </a:solidFill>
@@ -9844,7 +10388,7 @@
                     <a:p>
                       <a:pPr algn="ctr"/>
                       <a:r>
-                        <a:rPr sz="1180" b="0">
+                        <a:rPr sz="1130" b="0">
                           <a:solidFill>
                             <a:srgbClr val="1C2119"/>
                           </a:solidFill>
@@ -9861,7 +10405,7 @@
                   </a:tcPr>
                 </a:tc>
               </a:tr>
-              <a:tr h="360045">
+              <a:tr h="306977">
                 <a:tc>
                   <a:txBody>
                     <a:bodyPr/>
@@ -9869,13 +10413,13 @@
                     <a:p>
                       <a:pPr algn="l"/>
                       <a:r>
-                        <a:rPr sz="1180" b="1">
+                        <a:rPr sz="1130" b="1">
                           <a:solidFill>
                             <a:srgbClr val="1C2119"/>
                           </a:solidFill>
                           <a:latin typeface="Calibri"/>
                         </a:rPr>
-                        <a:t>vpd (vapor pressure deficit)</a:t>
+                        <a:t>vpd, sph</a:t>
                       </a:r>
                     </a:p>
                   </a:txBody>
@@ -9892,13 +10436,13 @@
                     <a:p>
                       <a:pPr algn="ctr"/>
                       <a:r>
-                        <a:rPr sz="1180" b="0">
+                        <a:rPr sz="1130" b="0">
                           <a:solidFill>
                             <a:srgbClr val="1C2119"/>
                           </a:solidFill>
                           <a:latin typeface="Calibri"/>
                         </a:rPr>
-                        <a:t>2m_temperature + 2m_dewpoint_temperature</a:t>
+                        <a:t>2m_temperature, dewpoint, surface_pressure</a:t>
                       </a:r>
                     </a:p>
                   </a:txBody>
@@ -9915,13 +10459,13 @@
                     <a:p>
                       <a:pPr algn="ctr"/>
                       <a:r>
-                        <a:rPr sz="1180" b="0">
+                        <a:rPr sz="1130" b="0">
                           <a:solidFill>
                             <a:srgbClr val="1C2119"/>
                           </a:solidFill>
                           <a:latin typeface="Calibri"/>
                         </a:rPr>
-                        <a:t>derived, FAO-56 Penman-Monteith</a:t>
+                        <a:t>derived (FAO-56 Penman-Monteith)</a:t>
                       </a:r>
                     </a:p>
                   </a:txBody>
@@ -9932,7 +10476,7 @@
                   </a:tcPr>
                 </a:tc>
               </a:tr>
-              <a:tr h="360045">
+              <a:tr h="306978">
                 <a:tc>
                   <a:txBody>
                     <a:bodyPr/>
@@ -9940,13 +10484,13 @@
                     <a:p>
                       <a:pPr algn="l"/>
                       <a:r>
-                        <a:rPr sz="1180" b="1">
+                        <a:rPr sz="1130" b="1">
                           <a:solidFill>
                             <a:srgbClr val="1C2119"/>
                           </a:solidFill>
                           <a:latin typeface="Calibri"/>
                         </a:rPr>
-                        <a:t>sph (specific humidity)</a:t>
+                        <a:t>vs (wind speed)</a:t>
                       </a:r>
                     </a:p>
                   </a:txBody>
@@ -9963,13 +10507,13 @@
                     <a:p>
                       <a:pPr algn="ctr"/>
                       <a:r>
-                        <a:rPr sz="1180" b="0">
+                        <a:rPr sz="1130" b="0">
                           <a:solidFill>
                             <a:srgbClr val="1C2119"/>
                           </a:solidFill>
                           <a:latin typeface="Calibri"/>
                         </a:rPr>
-                        <a:t>2m_dewpoint_temperature + surface_pressure</a:t>
+                        <a:t>10m u/v-wind components</a:t>
                       </a:r>
                     </a:p>
                   </a:txBody>
@@ -9986,90 +10530,19 @@
                     <a:p>
                       <a:pPr algn="ctr"/>
                       <a:r>
-                        <a:rPr sz="1180" b="0">
+                        <a:rPr sz="1130" b="0">
                           <a:solidFill>
                             <a:srgbClr val="1C2119"/>
                           </a:solidFill>
                           <a:latin typeface="Calibri"/>
                         </a:rPr>
-                        <a:t>derived</a:t>
+                        <a:t>magnitude of daily-mean vector</a:t>
                       </a:r>
                     </a:p>
                   </a:txBody>
                   <a:tcPr marT="38100" marB="38100">
                     <a:solidFill>
                       <a:srgbClr val="F5F6F1"/>
-                    </a:solidFill>
-                  </a:tcPr>
-                </a:tc>
-              </a:tr>
-              <a:tr h="360045">
-                <a:tc>
-                  <a:txBody>
-                    <a:bodyPr/>
-                    <a:lstStyle/>
-                    <a:p>
-                      <a:pPr algn="l"/>
-                      <a:r>
-                        <a:rPr sz="1180" b="1">
-                          <a:solidFill>
-                            <a:srgbClr val="1C2119"/>
-                          </a:solidFill>
-                          <a:latin typeface="Calibri"/>
-                        </a:rPr>
-                        <a:t>vs (wind speed)</a:t>
-                      </a:r>
-                    </a:p>
-                  </a:txBody>
-                  <a:tcPr marT="38100" marB="38100">
-                    <a:solidFill>
-                      <a:srgbClr val="FFFFFF"/>
-                    </a:solidFill>
-                  </a:tcPr>
-                </a:tc>
-                <a:tc>
-                  <a:txBody>
-                    <a:bodyPr/>
-                    <a:lstStyle/>
-                    <a:p>
-                      <a:pPr algn="ctr"/>
-                      <a:r>
-                        <a:rPr sz="1180" b="0">
-                          <a:solidFill>
-                            <a:srgbClr val="1C2119"/>
-                          </a:solidFill>
-                          <a:latin typeface="Calibri"/>
-                        </a:rPr>
-                        <a:t>10m u- and v-wind components</a:t>
-                      </a:r>
-                    </a:p>
-                  </a:txBody>
-                  <a:tcPr marT="38100" marB="38100">
-                    <a:solidFill>
-                      <a:srgbClr val="FFFFFF"/>
-                    </a:solidFill>
-                  </a:tcPr>
-                </a:tc>
-                <a:tc>
-                  <a:txBody>
-                    <a:bodyPr/>
-                    <a:lstStyle/>
-                    <a:p>
-                      <a:pPr algn="ctr"/>
-                      <a:r>
-                        <a:rPr sz="1180" b="0">
-                          <a:solidFill>
-                            <a:srgbClr val="1C2119"/>
-                          </a:solidFill>
-                          <a:latin typeface="Calibri"/>
-                        </a:rPr>
-                        <a:t>magnitude of daily-mean vector</a:t>
-                      </a:r>
-                    </a:p>
-                  </a:txBody>
-                  <a:tcPr marT="38100" marB="38100">
-                    <a:solidFill>
-                      <a:srgbClr val="FFFFFF"/>
                     </a:solidFill>
                   </a:tcPr>
                 </a:tc>
@@ -10086,8 +10559,8 @@
         </p:nvSpPr>
         <p:spPr>
           <a:xfrm>
-            <a:off x="502920" y="5074920"/>
-            <a:ext cx="10789920" cy="822960"/>
+            <a:off x="502920" y="4114800"/>
+            <a:ext cx="10789920" cy="1463040"/>
           </a:xfrm>
           <a:prstGeom prst="rect">
             <a:avLst/>
@@ -10124,7 +10597,7 @@
                 </a:solidFill>
                 <a:latin typeface="Calibri"/>
               </a:rPr>
-              <a:t>Same 7-variable mapping as the existing CDS-based pipeline — this is a drop-in replacement, not a redesign.</a:t>
+              <a:t>LAI: MOD15A2H.061 Lai_500m, 8-day, 500m, Terra-only (covers 2000 onward, unlike the Terra+Aqua combined product which only starts mid-2002) — QC-filtered to MODLAND-good-quality retrievals only (68.1% of pixel-dates kept; the rest are dropped, not interpolated over).</a:t>
             </a:r>
           </a:p>
           <a:p>
@@ -10152,7 +10625,7 @@
                 </a:solidFill>
                 <a:latin typeface="Calibri"/>
               </a:rPr>
-              <a:t>Engineering finding: every ERA5 cloud store is chunked as one whole-world snapshot per hour; batching all 70 pixels into one read made the full 2000–2022 fetch a ~2-hour, one-time cost (vs. CDS's per-pixel, multi-day queue).</a:t>
+              <a:t>Unlike the CONUS study's uniform ~1,000-step context, MODIS data gaps mean context length now varies by pixel (202–1,002 steps, median 696) — reported per-pixel, not hidden.</a:t>
             </a:r>
           </a:p>
         </p:txBody>
@@ -10318,7 +10791,7 @@
                 </a:solidFill>
                 <a:latin typeface="Calibri"/>
               </a:rPr>
-              <a:t>Same variable mapping, same units, same derivations as the CDS pipeline — only the acquisition path changed.</a:t>
+              <a:t>Same validated ERA5 pipeline; the new piece is a genuinely global LAI source (MODIS via AppEEARS) to replace CONUS-only gridMET/HiQ-LAI.</a:t>
             </a:r>
           </a:p>
         </p:txBody>
@@ -10383,7 +10856,7 @@
                 </a:solidFill>
                 <a:latin typeface="Calibri"/>
               </a:rPr>
-              <a:t>EXPERIMENT 2 — LARGE-SCALE CLOUD ERA5</a:t>
+              <a:t>PART 2 — NON-CONUS GLOBAL EXPERIMENT</a:t>
             </a:r>
           </a:p>
         </p:txBody>
@@ -10422,7 +10895,7 @@
                 </a:solidFill>
                 <a:latin typeface="Calibri"/>
               </a:rPr>
-              <a:t>Experiment 2: Pixel Distribution &amp; Experimental Design</a:t>
+              <a:t>Part 2: Global Pixel Selection &amp; Experimental Design</a:t>
             </a:r>
           </a:p>
         </p:txBody>
@@ -10519,7 +10992,7 @@
         <p:spPr>
           <a:xfrm>
             <a:off x="502920" y="1143000"/>
-            <a:ext cx="4114800" cy="4206240"/>
+            <a:ext cx="10789920" cy="1554480"/>
           </a:xfrm>
           <a:prstGeom prst="rect">
             <a:avLst/>
@@ -10537,11 +11010,11 @@
                 <a:spcPct val="106000"/>
               </a:lnSpc>
               <a:spcAft>
-                <a:spcPts val="1100"/>
+                <a:spcPts val="900"/>
               </a:spcAft>
             </a:pPr>
             <a:r>
-              <a:rPr sz="1500">
+              <a:rPr sz="1450">
                 <a:solidFill>
                   <a:srgbClr val="2F6F5E"/>
                 </a:solidFill>
@@ -10550,13 +11023,13 @@
               <a:t>▪  </a:t>
             </a:r>
             <a:r>
-              <a:rPr sz="1500">
+              <a:rPr sz="1450">
                 <a:solidFill>
                   <a:srgbClr val="1C2119"/>
                 </a:solidFill>
                 <a:latin typeface="Calibri"/>
               </a:rPr>
-              <a:t>Same 70-pixel CONUS pool as Experiment 1's parent set — reused unchanged, no new pixel sampling.</a:t>
+              <a:t>70 pixels selected by farthest-point sampling in vegetation-composition space over the global ESA CCI PFT product (same methodology as the CONUS pool, extended to a genuinely global, non-CONUS candidate set) — 10 vegetation classes, 14 world regions, purity 0.44–1.00.</a:t>
             </a:r>
           </a:p>
           <a:p>
@@ -10565,11 +11038,11 @@
                 <a:spcPct val="106000"/>
               </a:lnSpc>
               <a:spcAft>
-                <a:spcPts val="1100"/>
+                <a:spcPts val="900"/>
               </a:spcAft>
             </a:pPr>
             <a:r>
-              <a:rPr sz="1500">
+              <a:rPr sz="1450">
                 <a:solidFill>
                   <a:srgbClr val="2F6F5E"/>
                 </a:solidFill>
@@ -10578,104 +11051,20 @@
               <a:t>▪  </a:t>
             </a:r>
             <a:r>
-              <a:rPr sz="1500">
+              <a:rPr sz="1450">
                 <a:solidFill>
                   <a:srgbClr val="1C2119"/>
                 </a:solidFill>
                 <a:latin typeface="Calibri"/>
               </a:rPr>
-              <a:t>All 70 pixels are within the continental U.S. — the map below makes this explicit rather than implying a global sample.</a:t>
-            </a:r>
-          </a:p>
-          <a:p>
-            <a:pPr>
-              <a:lnSpc>
-                <a:spcPct val="106000"/>
-              </a:lnSpc>
-              <a:spcAft>
-                <a:spcPts val="1100"/>
-              </a:spcAft>
-            </a:pPr>
-            <a:r>
-              <a:rPr sz="1500">
-                <a:solidFill>
-                  <a:srgbClr val="2F6F5E"/>
-                </a:solidFill>
-                <a:latin typeface="Calibri"/>
-              </a:rPr>
-              <a:t>▪  </a:t>
-            </a:r>
-            <a:r>
-              <a:rPr sz="1500">
-                <a:solidFill>
-                  <a:srgbClr val="1C2119"/>
-                </a:solidFill>
-                <a:latin typeface="Calibri"/>
-              </a:rPr>
-              <a:t>Protocol matched to Experiment 1 exactly: context = 2000–2021 (~1,000 8-day composites), forecast = all steps of 2022, zero-shot Chronos-2, raw observed LAI as ground truth.</a:t>
-            </a:r>
-          </a:p>
-          <a:p>
-            <a:pPr>
-              <a:lnSpc>
-                <a:spcPct val="106000"/>
-              </a:lnSpc>
-              <a:spcAft>
-                <a:spcPts val="1100"/>
-              </a:spcAft>
-            </a:pPr>
-            <a:r>
-              <a:rPr sz="1500">
-                <a:solidFill>
-                  <a:srgbClr val="2F6F5E"/>
-                </a:solidFill>
-                <a:latin typeface="Calibri"/>
-              </a:rPr>
-              <a:t>▪  </a:t>
-            </a:r>
-            <a:r>
-              <a:rPr sz="1500">
-                <a:solidFill>
-                  <a:srgbClr val="1C2119"/>
-                </a:solidFill>
-                <a:latin typeface="Calibri"/>
-              </a:rPr>
-              <a:t>This fixes a limitation of the original ERA5 pilot, which used a much shorter 2-year context.</a:t>
-            </a:r>
-          </a:p>
-          <a:p>
-            <a:pPr>
-              <a:lnSpc>
-                <a:spcPct val="106000"/>
-              </a:lnSpc>
-              <a:spcAft>
-                <a:spcPts val="1100"/>
-              </a:spcAft>
-            </a:pPr>
-            <a:r>
-              <a:rPr sz="1500">
-                <a:solidFill>
-                  <a:srgbClr val="2F6F5E"/>
-                </a:solidFill>
-                <a:latin typeface="Calibri"/>
-              </a:rPr>
-              <a:t>▪  </a:t>
-            </a:r>
-            <a:r>
-              <a:rPr sz="1500">
-                <a:solidFill>
-                  <a:srgbClr val="1C2119"/>
-                </a:solidFill>
-                <a:latin typeface="Calibri"/>
-              </a:rPr>
-              <a:t>All 70 pixels completed successfully — 0 failures.</a:t>
+              <a:t>68/70 had enough usable LAI to run (2 excluded: one high-Arctic pixel with persistent polar night/ice, one Southeast Asia pixel with persistent monsoon cloud cover — both known MODIS limitations).</a:t>
             </a:r>
           </a:p>
         </p:txBody>
       </p:sp>
       <p:pic>
         <p:nvPicPr>
-          <p:cNvPr id="7" name="Picture 6" descr="map_70pixel_conus.png"/>
+          <p:cNvPr id="7" name="Picture 6" descr="global70_map.png"/>
           <p:cNvPicPr>
             <a:picLocks noChangeAspect="1"/>
           </p:cNvPicPr>
@@ -10689,8 +11078,8 @@
         </p:blipFill>
         <p:spPr>
           <a:xfrm>
-            <a:off x="4800600" y="1720538"/>
-            <a:ext cx="6492240" cy="3142603"/>
+            <a:off x="2393172" y="2834640"/>
+            <a:ext cx="7405351" cy="3127248"/>
           </a:xfrm>
           <a:prstGeom prst="rect">
             <a:avLst/>
@@ -10858,7 +11247,7 @@
                 </a:solidFill>
                 <a:latin typeface="Calibri"/>
               </a:rPr>
-              <a:t>Identical pixel pool and context length to Experiment 1 — the only variable that changed is the meteorological data source.</a:t>
+              <a:t>Protocol otherwise identical to Part 1: context = 2000–2021 (as available), forecast = 2022, zero-shot Chronos-2, no CONUS pixels.</a:t>
             </a:r>
           </a:p>
         </p:txBody>
@@ -10923,7 +11312,7 @@
                 </a:solidFill>
                 <a:latin typeface="Calibri"/>
               </a:rPr>
-              <a:t>EXPERIMENT 2 — VALIDATION BEFORE SCALING</a:t>
+              <a:t>VALIDATION BEHIND BOTH PARTS' ERA5 USE</a:t>
             </a:r>
           </a:p>
         </p:txBody>
@@ -10962,7 +11351,7 @@
                 </a:solidFill>
                 <a:latin typeface="Calibri"/>
               </a:rPr>
-              <a:t>ERA5 Equivalence Validation: CDS vs. Cloud</a:t>
+              <a:t>ERA5 Equivalence: CDS vs. Cloud, Visualized</a:t>
             </a:r>
           </a:p>
         </p:txBody>
@@ -11059,7 +11448,7 @@
         <p:spPr>
           <a:xfrm>
             <a:off x="502920" y="1143000"/>
-            <a:ext cx="10789920" cy="457200"/>
+            <a:ext cx="10789920" cy="365760"/>
           </a:xfrm>
           <a:prstGeom prst="rect">
             <a:avLst/>
@@ -11078,1132 +11467,44 @@
               </a:lnSpc>
             </a:pPr>
             <a:r>
-              <a:rPr sz="1450" b="0" i="0">
+              <a:rPr sz="1350" b="0" i="0">
                 <a:solidFill>
                   <a:srgbClr val="5C6355"/>
                 </a:solidFill>
                 <a:latin typeface="Calibri"/>
               </a:rPr>
-              <a:t>Before trusting the cloud source, it was validated against the original CDS pipeline on the same evergreen pixel, same 2021–2022 period.</a:t>
-            </a:r>
-          </a:p>
-        </p:txBody>
-      </p:sp>
-      <p:graphicFrame>
-        <p:nvGraphicFramePr>
-          <p:cNvPr id="7" name="Table 6"/>
-          <p:cNvGraphicFramePr>
-            <a:graphicFrameLocks noGrp="1"/>
-          </p:cNvGraphicFramePr>
-          <p:nvPr/>
-        </p:nvGraphicFramePr>
-        <p:xfrm>
-          <a:off x="502920" y="1645920"/>
-          <a:ext cx="11185854" cy="685800"/>
-        </p:xfrm>
-        <a:graphic>
-          <a:graphicData uri="http://schemas.openxmlformats.org/drawingml/2006/table">
-            <a:tbl>
-              <a:tblPr firstRow="1" bandRow="1">
-                <a:tableStyleId>{5C22544A-7EE6-4342-B048-85BDC9FD1C3A}</a:tableStyleId>
-              </a:tblPr>
-              <a:tblGrid>
-                <a:gridCol w="2572746"/>
-                <a:gridCol w="1230444"/>
-                <a:gridCol w="1230444"/>
-                <a:gridCol w="1230444"/>
-                <a:gridCol w="1230444"/>
-                <a:gridCol w="1230444"/>
-                <a:gridCol w="1230444"/>
-                <a:gridCol w="1230444"/>
-              </a:tblGrid>
-              <a:tr h="342900">
-                <a:tc>
-                  <a:txBody>
-                    <a:bodyPr/>
-                    <a:lstStyle/>
-                    <a:p>
-                      <a:pPr algn="l"/>
-                      <a:r>
-                        <a:rPr sz="1200" b="1">
-                          <a:solidFill>
-                            <a:srgbClr val="FFFFFF"/>
-                          </a:solidFill>
-                          <a:latin typeface="Calibri"/>
-                        </a:rPr>
-                        <a:t>Raw variable</a:t>
-                      </a:r>
-                    </a:p>
-                  </a:txBody>
-                  <a:tcPr marT="38100" marB="38100">
-                    <a:solidFill>
-                      <a:srgbClr val="2F6F5E"/>
-                    </a:solidFill>
-                  </a:tcPr>
-                </a:tc>
-                <a:tc>
-                  <a:txBody>
-                    <a:bodyPr/>
-                    <a:lstStyle/>
-                    <a:p>
-                      <a:pPr algn="ctr"/>
-                      <a:r>
-                        <a:rPr sz="1200" b="1">
-                          <a:solidFill>
-                            <a:srgbClr val="FFFFFF"/>
-                          </a:solidFill>
-                          <a:latin typeface="Calibri"/>
-                        </a:rPr>
-                        <a:t>tmmx</a:t>
-                      </a:r>
-                    </a:p>
-                  </a:txBody>
-                  <a:tcPr marT="38100" marB="38100">
-                    <a:solidFill>
-                      <a:srgbClr val="2F6F5E"/>
-                    </a:solidFill>
-                  </a:tcPr>
-                </a:tc>
-                <a:tc>
-                  <a:txBody>
-                    <a:bodyPr/>
-                    <a:lstStyle/>
-                    <a:p>
-                      <a:pPr algn="ctr"/>
-                      <a:r>
-                        <a:rPr sz="1200" b="1">
-                          <a:solidFill>
-                            <a:srgbClr val="FFFFFF"/>
-                          </a:solidFill>
-                          <a:latin typeface="Calibri"/>
-                        </a:rPr>
-                        <a:t>tmmn</a:t>
-                      </a:r>
-                    </a:p>
-                  </a:txBody>
-                  <a:tcPr marT="38100" marB="38100">
-                    <a:solidFill>
-                      <a:srgbClr val="2F6F5E"/>
-                    </a:solidFill>
-                  </a:tcPr>
-                </a:tc>
-                <a:tc>
-                  <a:txBody>
-                    <a:bodyPr/>
-                    <a:lstStyle/>
-                    <a:p>
-                      <a:pPr algn="ctr"/>
-                      <a:r>
-                        <a:rPr sz="1200" b="1">
-                          <a:solidFill>
-                            <a:srgbClr val="FFFFFF"/>
-                          </a:solidFill>
-                          <a:latin typeface="Calibri"/>
-                        </a:rPr>
-                        <a:t>pr</a:t>
-                      </a:r>
-                    </a:p>
-                  </a:txBody>
-                  <a:tcPr marT="38100" marB="38100">
-                    <a:solidFill>
-                      <a:srgbClr val="2F6F5E"/>
-                    </a:solidFill>
-                  </a:tcPr>
-                </a:tc>
-                <a:tc>
-                  <a:txBody>
-                    <a:bodyPr/>
-                    <a:lstStyle/>
-                    <a:p>
-                      <a:pPr algn="ctr"/>
-                      <a:r>
-                        <a:rPr sz="1200" b="1">
-                          <a:solidFill>
-                            <a:srgbClr val="FFFFFF"/>
-                          </a:solidFill>
-                          <a:latin typeface="Calibri"/>
-                        </a:rPr>
-                        <a:t>srad</a:t>
-                      </a:r>
-                    </a:p>
-                  </a:txBody>
-                  <a:tcPr marT="38100" marB="38100">
-                    <a:solidFill>
-                      <a:srgbClr val="2F6F5E"/>
-                    </a:solidFill>
-                  </a:tcPr>
-                </a:tc>
-                <a:tc>
-                  <a:txBody>
-                    <a:bodyPr/>
-                    <a:lstStyle/>
-                    <a:p>
-                      <a:pPr algn="ctr"/>
-                      <a:r>
-                        <a:rPr sz="1200" b="1">
-                          <a:solidFill>
-                            <a:srgbClr val="FFFFFF"/>
-                          </a:solidFill>
-                          <a:latin typeface="Calibri"/>
-                        </a:rPr>
-                        <a:t>vpd</a:t>
-                      </a:r>
-                    </a:p>
-                  </a:txBody>
-                  <a:tcPr marT="38100" marB="38100">
-                    <a:solidFill>
-                      <a:srgbClr val="2F6F5E"/>
-                    </a:solidFill>
-                  </a:tcPr>
-                </a:tc>
-                <a:tc>
-                  <a:txBody>
-                    <a:bodyPr/>
-                    <a:lstStyle/>
-                    <a:p>
-                      <a:pPr algn="ctr"/>
-                      <a:r>
-                        <a:rPr sz="1200" b="1">
-                          <a:solidFill>
-                            <a:srgbClr val="FFFFFF"/>
-                          </a:solidFill>
-                          <a:latin typeface="Calibri"/>
-                        </a:rPr>
-                        <a:t>sph</a:t>
-                      </a:r>
-                    </a:p>
-                  </a:txBody>
-                  <a:tcPr marT="38100" marB="38100">
-                    <a:solidFill>
-                      <a:srgbClr val="2F6F5E"/>
-                    </a:solidFill>
-                  </a:tcPr>
-                </a:tc>
-                <a:tc>
-                  <a:txBody>
-                    <a:bodyPr/>
-                    <a:lstStyle/>
-                    <a:p>
-                      <a:pPr algn="ctr"/>
-                      <a:r>
-                        <a:rPr sz="1200" b="1">
-                          <a:solidFill>
-                            <a:srgbClr val="FFFFFF"/>
-                          </a:solidFill>
-                          <a:latin typeface="Calibri"/>
-                        </a:rPr>
-                        <a:t>vs</a:t>
-                      </a:r>
-                    </a:p>
-                  </a:txBody>
-                  <a:tcPr marT="38100" marB="38100">
-                    <a:solidFill>
-                      <a:srgbClr val="2F6F5E"/>
-                    </a:solidFill>
-                  </a:tcPr>
-                </a:tc>
-              </a:tr>
-              <a:tr h="342900">
-                <a:tc>
-                  <a:txBody>
-                    <a:bodyPr/>
-                    <a:lstStyle/>
-                    <a:p>
-                      <a:pPr algn="l"/>
-                      <a:r>
-                        <a:rPr sz="1200" b="1">
-                          <a:solidFill>
-                            <a:srgbClr val="1C2119"/>
-                          </a:solidFill>
-                          <a:latin typeface="Calibri"/>
-                        </a:rPr>
-                        <a:t>Pearson r (CDS vs. cloud)</a:t>
-                      </a:r>
-                    </a:p>
-                  </a:txBody>
-                  <a:tcPr marT="38100" marB="38100">
-                    <a:solidFill>
-                      <a:srgbClr val="FFFFFF"/>
-                    </a:solidFill>
-                  </a:tcPr>
-                </a:tc>
-                <a:tc>
-                  <a:txBody>
-                    <a:bodyPr/>
-                    <a:lstStyle/>
-                    <a:p>
-                      <a:pPr algn="ctr"/>
-                      <a:r>
-                        <a:rPr sz="1200" b="0">
-                          <a:solidFill>
-                            <a:srgbClr val="1C2119"/>
-                          </a:solidFill>
-                          <a:latin typeface="Calibri"/>
-                        </a:rPr>
-                        <a:t>0.997</a:t>
-                      </a:r>
-                    </a:p>
-                  </a:txBody>
-                  <a:tcPr marT="38100" marB="38100">
-                    <a:solidFill>
-                      <a:srgbClr val="FFFFFF"/>
-                    </a:solidFill>
-                  </a:tcPr>
-                </a:tc>
-                <a:tc>
-                  <a:txBody>
-                    <a:bodyPr/>
-                    <a:lstStyle/>
-                    <a:p>
-                      <a:pPr algn="ctr"/>
-                      <a:r>
-                        <a:rPr sz="1200" b="0">
-                          <a:solidFill>
-                            <a:srgbClr val="1C2119"/>
-                          </a:solidFill>
-                          <a:latin typeface="Calibri"/>
-                        </a:rPr>
-                        <a:t>0.999</a:t>
-                      </a:r>
-                    </a:p>
-                  </a:txBody>
-                  <a:tcPr marT="38100" marB="38100">
-                    <a:solidFill>
-                      <a:srgbClr val="FFFFFF"/>
-                    </a:solidFill>
-                  </a:tcPr>
-                </a:tc>
-                <a:tc>
-                  <a:txBody>
-                    <a:bodyPr/>
-                    <a:lstStyle/>
-                    <a:p>
-                      <a:pPr algn="ctr"/>
-                      <a:r>
-                        <a:rPr sz="1200" b="0">
-                          <a:solidFill>
-                            <a:srgbClr val="1C2119"/>
-                          </a:solidFill>
-                          <a:latin typeface="Calibri"/>
-                        </a:rPr>
-                        <a:t>0.954</a:t>
-                      </a:r>
-                    </a:p>
-                  </a:txBody>
-                  <a:tcPr marT="38100" marB="38100">
-                    <a:solidFill>
-                      <a:srgbClr val="FFFFFF"/>
-                    </a:solidFill>
-                  </a:tcPr>
-                </a:tc>
-                <a:tc>
-                  <a:txBody>
-                    <a:bodyPr/>
-                    <a:lstStyle/>
-                    <a:p>
-                      <a:pPr algn="ctr"/>
-                      <a:r>
-                        <a:rPr sz="1200" b="0">
-                          <a:solidFill>
-                            <a:srgbClr val="1C2119"/>
-                          </a:solidFill>
-                          <a:latin typeface="Calibri"/>
-                        </a:rPr>
-                        <a:t>0.996</a:t>
-                      </a:r>
-                    </a:p>
-                  </a:txBody>
-                  <a:tcPr marT="38100" marB="38100">
-                    <a:solidFill>
-                      <a:srgbClr val="FFFFFF"/>
-                    </a:solidFill>
-                  </a:tcPr>
-                </a:tc>
-                <a:tc>
-                  <a:txBody>
-                    <a:bodyPr/>
-                    <a:lstStyle/>
-                    <a:p>
-                      <a:pPr algn="ctr"/>
-                      <a:r>
-                        <a:rPr sz="1200" b="0">
-                          <a:solidFill>
-                            <a:srgbClr val="1C2119"/>
-                          </a:solidFill>
-                          <a:latin typeface="Calibri"/>
-                        </a:rPr>
-                        <a:t>0.987</a:t>
-                      </a:r>
-                    </a:p>
-                  </a:txBody>
-                  <a:tcPr marT="38100" marB="38100">
-                    <a:solidFill>
-                      <a:srgbClr val="FFFFFF"/>
-                    </a:solidFill>
-                  </a:tcPr>
-                </a:tc>
-                <a:tc>
-                  <a:txBody>
-                    <a:bodyPr/>
-                    <a:lstStyle/>
-                    <a:p>
-                      <a:pPr algn="ctr"/>
-                      <a:r>
-                        <a:rPr sz="1200" b="0">
-                          <a:solidFill>
-                            <a:srgbClr val="1C2119"/>
-                          </a:solidFill>
-                          <a:latin typeface="Calibri"/>
-                        </a:rPr>
-                        <a:t>0.999</a:t>
-                      </a:r>
-                    </a:p>
-                  </a:txBody>
-                  <a:tcPr marT="38100" marB="38100">
-                    <a:solidFill>
-                      <a:srgbClr val="FFFFFF"/>
-                    </a:solidFill>
-                  </a:tcPr>
-                </a:tc>
-                <a:tc>
-                  <a:txBody>
-                    <a:bodyPr/>
-                    <a:lstStyle/>
-                    <a:p>
-                      <a:pPr algn="ctr"/>
-                      <a:r>
-                        <a:rPr sz="1200" b="0">
-                          <a:solidFill>
-                            <a:srgbClr val="1C2119"/>
-                          </a:solidFill>
-                          <a:latin typeface="Calibri"/>
-                        </a:rPr>
-                        <a:t>0.992</a:t>
-                      </a:r>
-                    </a:p>
-                  </a:txBody>
-                  <a:tcPr marT="38100" marB="38100">
-                    <a:solidFill>
-                      <a:srgbClr val="FFFFFF"/>
-                    </a:solidFill>
-                  </a:tcPr>
-                </a:tc>
-              </a:tr>
-            </a:tbl>
-          </a:graphicData>
-        </a:graphic>
-      </p:graphicFrame>
-      <p:sp>
-        <p:nvSpPr>
-          <p:cNvPr id="8" name="TextBox 7"/>
-          <p:cNvSpPr txBox="1"/>
-          <p:nvPr/>
-        </p:nvSpPr>
-        <p:spPr>
-          <a:xfrm>
-            <a:off x="502920" y="2468880"/>
-            <a:ext cx="10789920" cy="320040"/>
-          </a:xfrm>
-          <a:prstGeom prst="rect">
-            <a:avLst/>
-          </a:prstGeom>
-          <a:noFill/>
-        </p:spPr>
-        <p:txBody>
-          <a:bodyPr wrap="square" anchor="t" lIns="0" rIns="0" tIns="0" bIns="0">
-            <a:spAutoFit/>
-          </a:bodyPr>
-          <a:lstStyle/>
-          <a:p>
-            <a:pPr algn="l">
-              <a:lnSpc>
-                <a:spcPct val="100000"/>
-              </a:lnSpc>
-            </a:pPr>
-            <a:r>
-              <a:rPr sz="1350" b="1" i="0">
-                <a:solidFill>
-                  <a:srgbClr val="5C6355"/>
-                </a:solidFill>
-                <a:latin typeface="Calibri"/>
-              </a:rPr>
-              <a:t>Zero-shot Chronos-2 forecast, same pixel, same short 2020–2021 context:</a:t>
-            </a:r>
-          </a:p>
-        </p:txBody>
-      </p:sp>
-      <p:graphicFrame>
-        <p:nvGraphicFramePr>
-          <p:cNvPr id="9" name="Table 8"/>
-          <p:cNvGraphicFramePr>
-            <a:graphicFrameLocks noGrp="1"/>
-          </p:cNvGraphicFramePr>
-          <p:nvPr/>
-        </p:nvGraphicFramePr>
-        <p:xfrm>
-          <a:off x="502920" y="2834640"/>
-          <a:ext cx="11185853" cy="1280160"/>
-        </p:xfrm>
-        <a:graphic>
-          <a:graphicData uri="http://schemas.openxmlformats.org/drawingml/2006/table">
-            <a:tbl>
-              <a:tblPr firstRow="1" bandRow="1">
-                <a:tableStyleId>{5C22544A-7EE6-4342-B048-85BDC9FD1C3A}</a:tableStyleId>
-              </a:tblPr>
-              <a:tblGrid>
-                <a:gridCol w="3803190"/>
-                <a:gridCol w="1454161"/>
-                <a:gridCol w="1454161"/>
-                <a:gridCol w="1454161"/>
-                <a:gridCol w="1454161"/>
-                <a:gridCol w="1566019"/>
-              </a:tblGrid>
-              <a:tr h="320040">
-                <a:tc>
-                  <a:txBody>
-                    <a:bodyPr/>
-                    <a:lstStyle/>
-                    <a:p>
-                      <a:pPr algn="l"/>
-                      <a:r>
-                        <a:rPr sz="1250" b="1">
-                          <a:solidFill>
-                            <a:srgbClr val="FFFFFF"/>
-                          </a:solidFill>
-                          <a:latin typeface="Calibri"/>
-                        </a:rPr>
-                        <a:t>Source</a:t>
-                      </a:r>
-                    </a:p>
-                  </a:txBody>
-                  <a:tcPr marT="38100" marB="38100">
-                    <a:solidFill>
-                      <a:srgbClr val="2F6F5E"/>
-                    </a:solidFill>
-                  </a:tcPr>
-                </a:tc>
-                <a:tc>
-                  <a:txBody>
-                    <a:bodyPr/>
-                    <a:lstStyle/>
-                    <a:p>
-                      <a:pPr algn="ctr"/>
-                      <a:r>
-                        <a:rPr sz="1250" b="1">
-                          <a:solidFill>
-                            <a:srgbClr val="FFFFFF"/>
-                          </a:solidFill>
-                          <a:latin typeface="Calibri"/>
-                        </a:rPr>
-                        <a:t>RMSE</a:t>
-                      </a:r>
-                    </a:p>
-                  </a:txBody>
-                  <a:tcPr marT="38100" marB="38100">
-                    <a:solidFill>
-                      <a:srgbClr val="2F6F5E"/>
-                    </a:solidFill>
-                  </a:tcPr>
-                </a:tc>
-                <a:tc>
-                  <a:txBody>
-                    <a:bodyPr/>
-                    <a:lstStyle/>
-                    <a:p>
-                      <a:pPr algn="ctr"/>
-                      <a:r>
-                        <a:rPr sz="1250" b="1">
-                          <a:solidFill>
-                            <a:srgbClr val="FFFFFF"/>
-                          </a:solidFill>
-                          <a:latin typeface="Calibri"/>
-                        </a:rPr>
-                        <a:t>MAE</a:t>
-                      </a:r>
-                    </a:p>
-                  </a:txBody>
-                  <a:tcPr marT="38100" marB="38100">
-                    <a:solidFill>
-                      <a:srgbClr val="2F6F5E"/>
-                    </a:solidFill>
-                  </a:tcPr>
-                </a:tc>
-                <a:tc>
-                  <a:txBody>
-                    <a:bodyPr/>
-                    <a:lstStyle/>
-                    <a:p>
-                      <a:pPr algn="ctr"/>
-                      <a:r>
-                        <a:rPr sz="1250" b="1">
-                          <a:solidFill>
-                            <a:srgbClr val="FFFFFF"/>
-                          </a:solidFill>
-                          <a:latin typeface="Calibri"/>
-                        </a:rPr>
-                        <a:t>MAPE</a:t>
-                      </a:r>
-                    </a:p>
-                  </a:txBody>
-                  <a:tcPr marT="38100" marB="38100">
-                    <a:solidFill>
-                      <a:srgbClr val="2F6F5E"/>
-                    </a:solidFill>
-                  </a:tcPr>
-                </a:tc>
-                <a:tc>
-                  <a:txBody>
-                    <a:bodyPr/>
-                    <a:lstStyle/>
-                    <a:p>
-                      <a:pPr algn="ctr"/>
-                      <a:r>
-                        <a:rPr sz="1250" b="1">
-                          <a:solidFill>
-                            <a:srgbClr val="FFFFFF"/>
-                          </a:solidFill>
-                          <a:latin typeface="Calibri"/>
-                        </a:rPr>
-                        <a:t>R²</a:t>
-                      </a:r>
-                    </a:p>
-                  </a:txBody>
-                  <a:tcPr marT="38100" marB="38100">
-                    <a:solidFill>
-                      <a:srgbClr val="2F6F5E"/>
-                    </a:solidFill>
-                  </a:tcPr>
-                </a:tc>
-                <a:tc>
-                  <a:txBody>
-                    <a:bodyPr/>
-                    <a:lstStyle/>
-                    <a:p>
-                      <a:pPr algn="ctr"/>
-                      <a:r>
-                        <a:rPr sz="1250" b="1">
-                          <a:solidFill>
-                            <a:srgbClr val="FFFFFF"/>
-                          </a:solidFill>
-                          <a:latin typeface="Calibri"/>
-                        </a:rPr>
-                        <a:t>Pearson r</a:t>
-                      </a:r>
-                    </a:p>
-                  </a:txBody>
-                  <a:tcPr marT="38100" marB="38100">
-                    <a:solidFill>
-                      <a:srgbClr val="2F6F5E"/>
-                    </a:solidFill>
-                  </a:tcPr>
-                </a:tc>
-              </a:tr>
-              <a:tr h="320040">
-                <a:tc>
-                  <a:txBody>
-                    <a:bodyPr/>
-                    <a:lstStyle/>
-                    <a:p>
-                      <a:pPr algn="l"/>
-                      <a:r>
-                        <a:rPr sz="1200" b="1">
-                          <a:solidFill>
-                            <a:srgbClr val="1C2119"/>
-                          </a:solidFill>
-                          <a:latin typeface="Calibri"/>
-                        </a:rPr>
-                        <a:t>CDS ERA5 (original)</a:t>
-                      </a:r>
-                    </a:p>
-                  </a:txBody>
-                  <a:tcPr marT="38100" marB="38100">
-                    <a:solidFill>
-                      <a:srgbClr val="FFFFFF"/>
-                    </a:solidFill>
-                  </a:tcPr>
-                </a:tc>
-                <a:tc>
-                  <a:txBody>
-                    <a:bodyPr/>
-                    <a:lstStyle/>
-                    <a:p>
-                      <a:pPr algn="ctr"/>
-                      <a:r>
-                        <a:rPr sz="1200" b="0">
-                          <a:solidFill>
-                            <a:srgbClr val="1C2119"/>
-                          </a:solidFill>
-                          <a:latin typeface="Calibri"/>
-                        </a:rPr>
-                        <a:t>0.5337</a:t>
-                      </a:r>
-                    </a:p>
-                  </a:txBody>
-                  <a:tcPr marT="38100" marB="38100">
-                    <a:solidFill>
-                      <a:srgbClr val="FFFFFF"/>
-                    </a:solidFill>
-                  </a:tcPr>
-                </a:tc>
-                <a:tc>
-                  <a:txBody>
-                    <a:bodyPr/>
-                    <a:lstStyle/>
-                    <a:p>
-                      <a:pPr algn="ctr"/>
-                      <a:r>
-                        <a:rPr sz="1200" b="0">
-                          <a:solidFill>
-                            <a:srgbClr val="1C2119"/>
-                          </a:solidFill>
-                          <a:latin typeface="Calibri"/>
-                        </a:rPr>
-                        <a:t>0.4462</a:t>
-                      </a:r>
-                    </a:p>
-                  </a:txBody>
-                  <a:tcPr marT="38100" marB="38100">
-                    <a:solidFill>
-                      <a:srgbClr val="FFFFFF"/>
-                    </a:solidFill>
-                  </a:tcPr>
-                </a:tc>
-                <a:tc>
-                  <a:txBody>
-                    <a:bodyPr/>
-                    <a:lstStyle/>
-                    <a:p>
-                      <a:pPr algn="ctr"/>
-                      <a:r>
-                        <a:rPr sz="1200" b="0">
-                          <a:solidFill>
-                            <a:srgbClr val="1C2119"/>
-                          </a:solidFill>
-                          <a:latin typeface="Calibri"/>
-                        </a:rPr>
-                        <a:t>14.596</a:t>
-                      </a:r>
-                    </a:p>
-                  </a:txBody>
-                  <a:tcPr marT="38100" marB="38100">
-                    <a:solidFill>
-                      <a:srgbClr val="FFFFFF"/>
-                    </a:solidFill>
-                  </a:tcPr>
-                </a:tc>
-                <a:tc>
-                  <a:txBody>
-                    <a:bodyPr/>
-                    <a:lstStyle/>
-                    <a:p>
-                      <a:pPr algn="ctr"/>
-                      <a:r>
-                        <a:rPr sz="1200" b="0">
-                          <a:solidFill>
-                            <a:srgbClr val="1C2119"/>
-                          </a:solidFill>
-                          <a:latin typeface="Calibri"/>
-                        </a:rPr>
-                        <a:t>0.7967</a:t>
-                      </a:r>
-                    </a:p>
-                  </a:txBody>
-                  <a:tcPr marT="38100" marB="38100">
-                    <a:solidFill>
-                      <a:srgbClr val="FFFFFF"/>
-                    </a:solidFill>
-                  </a:tcPr>
-                </a:tc>
-                <a:tc>
-                  <a:txBody>
-                    <a:bodyPr/>
-                    <a:lstStyle/>
-                    <a:p>
-                      <a:pPr algn="ctr"/>
-                      <a:r>
-                        <a:rPr sz="1200" b="0">
-                          <a:solidFill>
-                            <a:srgbClr val="1C2119"/>
-                          </a:solidFill>
-                          <a:latin typeface="Calibri"/>
-                        </a:rPr>
-                        <a:t>0.9017</a:t>
-                      </a:r>
-                    </a:p>
-                  </a:txBody>
-                  <a:tcPr marT="38100" marB="38100">
-                    <a:solidFill>
-                      <a:srgbClr val="FFFFFF"/>
-                    </a:solidFill>
-                  </a:tcPr>
-                </a:tc>
-              </a:tr>
-              <a:tr h="320040">
-                <a:tc>
-                  <a:txBody>
-                    <a:bodyPr/>
-                    <a:lstStyle/>
-                    <a:p>
-                      <a:pPr algn="l"/>
-                      <a:r>
-                        <a:rPr sz="1200" b="1">
-                          <a:solidFill>
-                            <a:srgbClr val="1C2119"/>
-                          </a:solidFill>
-                          <a:latin typeface="Calibri"/>
-                        </a:rPr>
-                        <a:t>Cloud ERA5 (this validation)</a:t>
-                      </a:r>
-                    </a:p>
-                  </a:txBody>
-                  <a:tcPr marT="38100" marB="38100">
-                    <a:solidFill>
-                      <a:srgbClr val="E7F0E6"/>
-                    </a:solidFill>
-                  </a:tcPr>
-                </a:tc>
-                <a:tc>
-                  <a:txBody>
-                    <a:bodyPr/>
-                    <a:lstStyle/>
-                    <a:p>
-                      <a:pPr algn="ctr"/>
-                      <a:r>
-                        <a:rPr sz="1200" b="1">
-                          <a:solidFill>
-                            <a:srgbClr val="1C2119"/>
-                          </a:solidFill>
-                          <a:latin typeface="Calibri"/>
-                        </a:rPr>
-                        <a:t>0.4200</a:t>
-                      </a:r>
-                    </a:p>
-                  </a:txBody>
-                  <a:tcPr marT="38100" marB="38100">
-                    <a:solidFill>
-                      <a:srgbClr val="E7F0E6"/>
-                    </a:solidFill>
-                  </a:tcPr>
-                </a:tc>
-                <a:tc>
-                  <a:txBody>
-                    <a:bodyPr/>
-                    <a:lstStyle/>
-                    <a:p>
-                      <a:pPr algn="ctr"/>
-                      <a:r>
-                        <a:rPr sz="1200" b="1">
-                          <a:solidFill>
-                            <a:srgbClr val="1C2119"/>
-                          </a:solidFill>
-                          <a:latin typeface="Calibri"/>
-                        </a:rPr>
-                        <a:t>0.3588</a:t>
-                      </a:r>
-                    </a:p>
-                  </a:txBody>
-                  <a:tcPr marT="38100" marB="38100">
-                    <a:solidFill>
-                      <a:srgbClr val="E7F0E6"/>
-                    </a:solidFill>
-                  </a:tcPr>
-                </a:tc>
-                <a:tc>
-                  <a:txBody>
-                    <a:bodyPr/>
-                    <a:lstStyle/>
-                    <a:p>
-                      <a:pPr algn="ctr"/>
-                      <a:r>
-                        <a:rPr sz="1200" b="1">
-                          <a:solidFill>
-                            <a:srgbClr val="1C2119"/>
-                          </a:solidFill>
-                          <a:latin typeface="Calibri"/>
-                        </a:rPr>
-                        <a:t>12.14</a:t>
-                      </a:r>
-                    </a:p>
-                  </a:txBody>
-                  <a:tcPr marT="38100" marB="38100">
-                    <a:solidFill>
-                      <a:srgbClr val="E7F0E6"/>
-                    </a:solidFill>
-                  </a:tcPr>
-                </a:tc>
-                <a:tc>
-                  <a:txBody>
-                    <a:bodyPr/>
-                    <a:lstStyle/>
-                    <a:p>
-                      <a:pPr algn="ctr"/>
-                      <a:r>
-                        <a:rPr sz="1200" b="1">
-                          <a:solidFill>
-                            <a:srgbClr val="1C2119"/>
-                          </a:solidFill>
-                          <a:latin typeface="Calibri"/>
-                        </a:rPr>
-                        <a:t>0.8741</a:t>
-                      </a:r>
-                    </a:p>
-                  </a:txBody>
-                  <a:tcPr marT="38100" marB="38100">
-                    <a:solidFill>
-                      <a:srgbClr val="E7F0E6"/>
-                    </a:solidFill>
-                  </a:tcPr>
-                </a:tc>
-                <a:tc>
-                  <a:txBody>
-                    <a:bodyPr/>
-                    <a:lstStyle/>
-                    <a:p>
-                      <a:pPr algn="ctr"/>
-                      <a:r>
-                        <a:rPr sz="1200" b="1">
-                          <a:solidFill>
-                            <a:srgbClr val="1C2119"/>
-                          </a:solidFill>
-                          <a:latin typeface="Calibri"/>
-                        </a:rPr>
-                        <a:t>0.9447</a:t>
-                      </a:r>
-                    </a:p>
-                  </a:txBody>
-                  <a:tcPr marT="38100" marB="38100">
-                    <a:solidFill>
-                      <a:srgbClr val="E7F0E6"/>
-                    </a:solidFill>
-                  </a:tcPr>
-                </a:tc>
-              </a:tr>
-              <a:tr h="320040">
-                <a:tc>
-                  <a:txBody>
-                    <a:bodyPr/>
-                    <a:lstStyle/>
-                    <a:p>
-                      <a:pPr algn="l"/>
-                      <a:r>
-                        <a:rPr sz="1200" b="1">
-                          <a:solidFill>
-                            <a:srgbClr val="1C2119"/>
-                          </a:solidFill>
-                          <a:latin typeface="Calibri"/>
-                        </a:rPr>
-                        <a:t>gridMET (same pixel, reference)</a:t>
-                      </a:r>
-                    </a:p>
-                  </a:txBody>
-                  <a:tcPr marT="38100" marB="38100">
-                    <a:solidFill>
-                      <a:srgbClr val="FFFFFF"/>
-                    </a:solidFill>
-                  </a:tcPr>
-                </a:tc>
-                <a:tc>
-                  <a:txBody>
-                    <a:bodyPr/>
-                    <a:lstStyle/>
-                    <a:p>
-                      <a:pPr algn="ctr"/>
-                      <a:r>
-                        <a:rPr sz="1200" b="0">
-                          <a:solidFill>
-                            <a:srgbClr val="1C2119"/>
-                          </a:solidFill>
-                          <a:latin typeface="Calibri"/>
-                        </a:rPr>
-                        <a:t>0.4850</a:t>
-                      </a:r>
-                    </a:p>
-                  </a:txBody>
-                  <a:tcPr marT="38100" marB="38100">
-                    <a:solidFill>
-                      <a:srgbClr val="FFFFFF"/>
-                    </a:solidFill>
-                  </a:tcPr>
-                </a:tc>
-                <a:tc>
-                  <a:txBody>
-                    <a:bodyPr/>
-                    <a:lstStyle/>
-                    <a:p>
-                      <a:pPr algn="ctr"/>
-                      <a:r>
-                        <a:rPr sz="1200" b="0">
-                          <a:solidFill>
-                            <a:srgbClr val="1C2119"/>
-                          </a:solidFill>
-                          <a:latin typeface="Calibri"/>
-                        </a:rPr>
-                        <a:t>0.4259</a:t>
-                      </a:r>
-                    </a:p>
-                  </a:txBody>
-                  <a:tcPr marT="38100" marB="38100">
-                    <a:solidFill>
-                      <a:srgbClr val="FFFFFF"/>
-                    </a:solidFill>
-                  </a:tcPr>
-                </a:tc>
-                <a:tc>
-                  <a:txBody>
-                    <a:bodyPr/>
-                    <a:lstStyle/>
-                    <a:p>
-                      <a:pPr algn="ctr"/>
-                      <a:r>
-                        <a:rPr sz="1200" b="0">
-                          <a:solidFill>
-                            <a:srgbClr val="1C2119"/>
-                          </a:solidFill>
-                          <a:latin typeface="Calibri"/>
-                        </a:rPr>
-                        <a:t>14.02</a:t>
-                      </a:r>
-                    </a:p>
-                  </a:txBody>
-                  <a:tcPr marT="38100" marB="38100">
-                    <a:solidFill>
-                      <a:srgbClr val="FFFFFF"/>
-                    </a:solidFill>
-                  </a:tcPr>
-                </a:tc>
-                <a:tc>
-                  <a:txBody>
-                    <a:bodyPr/>
-                    <a:lstStyle/>
-                    <a:p>
-                      <a:pPr algn="ctr"/>
-                      <a:r>
-                        <a:rPr sz="1200" b="0">
-                          <a:solidFill>
-                            <a:srgbClr val="1C2119"/>
-                          </a:solidFill>
-                          <a:latin typeface="Calibri"/>
-                        </a:rPr>
-                        <a:t>0.8322</a:t>
-                      </a:r>
-                    </a:p>
-                  </a:txBody>
-                  <a:tcPr marT="38100" marB="38100">
-                    <a:solidFill>
-                      <a:srgbClr val="FFFFFF"/>
-                    </a:solidFill>
-                  </a:tcPr>
-                </a:tc>
-                <a:tc>
-                  <a:txBody>
-                    <a:bodyPr/>
-                    <a:lstStyle/>
-                    <a:p>
-                      <a:pPr algn="ctr"/>
-                      <a:r>
-                        <a:rPr sz="1200" b="0">
-                          <a:solidFill>
-                            <a:srgbClr val="1C2119"/>
-                          </a:solidFill>
-                          <a:latin typeface="Calibri"/>
-                        </a:rPr>
-                        <a:t>0.9301</a:t>
-                      </a:r>
-                    </a:p>
-                  </a:txBody>
-                  <a:tcPr marT="38100" marB="38100">
-                    <a:solidFill>
-                      <a:srgbClr val="FFFFFF"/>
-                    </a:solidFill>
-                  </a:tcPr>
-                </a:tc>
-              </a:tr>
-            </a:tbl>
-          </a:graphicData>
-        </a:graphic>
-      </p:graphicFrame>
-      <p:sp>
-        <p:nvSpPr>
-          <p:cNvPr id="10" name="TextBox 9"/>
-          <p:cNvSpPr txBox="1"/>
-          <p:nvPr/>
-        </p:nvSpPr>
-        <p:spPr>
-          <a:xfrm>
-            <a:off x="502920" y="4343400"/>
-            <a:ext cx="10789920" cy="822960"/>
-          </a:xfrm>
-          <a:prstGeom prst="rect">
-            <a:avLst/>
-          </a:prstGeom>
-          <a:noFill/>
-        </p:spPr>
-        <p:txBody>
-          <a:bodyPr wrap="square" anchor="t" lIns="0" rIns="0">
-            <a:spAutoFit/>
-          </a:bodyPr>
-          <a:lstStyle/>
-          <a:p>
-            <a:pPr>
-              <a:lnSpc>
-                <a:spcPct val="106000"/>
-              </a:lnSpc>
-              <a:spcAft>
-                <a:spcPts val="500"/>
-              </a:spcAft>
-            </a:pPr>
-            <a:r>
-              <a:rPr sz="1250">
-                <a:solidFill>
-                  <a:srgbClr val="2F6F5E"/>
-                </a:solidFill>
-                <a:latin typeface="Calibri"/>
-              </a:rPr>
-              <a:t>▪  </a:t>
-            </a:r>
-            <a:r>
-              <a:rPr sz="1250">
-                <a:solidFill>
-                  <a:srgbClr val="1C2119"/>
-                </a:solidFill>
-                <a:latin typeface="Calibri"/>
-              </a:rPr>
-              <a:t>RESULT: 5 of 7 variables agree closely (r ≥ 0.987); precipitation and wind show a moderate, diagnosed-but-not-fully-resolved discrepancy, most likely from ERA5's forecast-cycle de-accumulation.</a:t>
-            </a:r>
-          </a:p>
-          <a:p>
-            <a:pPr>
-              <a:lnSpc>
-                <a:spcPct val="106000"/>
-              </a:lnSpc>
-              <a:spcAft>
-                <a:spcPts val="500"/>
-              </a:spcAft>
-            </a:pPr>
-            <a:r>
-              <a:rPr sz="1250">
-                <a:solidFill>
-                  <a:srgbClr val="2F6F5E"/>
-                </a:solidFill>
-                <a:latin typeface="Calibri"/>
-              </a:rPr>
-              <a:t>▪  </a:t>
-            </a:r>
-            <a:r>
-              <a:rPr sz="1250">
-                <a:solidFill>
-                  <a:srgbClr val="1C2119"/>
-                </a:solidFill>
-                <a:latin typeface="Calibri"/>
-              </a:rPr>
-              <a:t>INTERPRETATION: both CDS and cloud forecasts are "good" and bracket the independent gridMET result — consistent with ordinary data-source variability, not a broken pipeline.</a:t>
-            </a:r>
-          </a:p>
-        </p:txBody>
-      </p:sp>
-      <p:sp>
-        <p:nvSpPr>
-          <p:cNvPr id="11" name="Rectangle 10"/>
+              <a:t>Same evergreen pixel, 2021–2022 — actual daily values, not just a correlation coefficient:</a:t>
+            </a:r>
+          </a:p>
+        </p:txBody>
+      </p:sp>
+      <p:pic>
+        <p:nvPicPr>
+          <p:cNvPr id="7" name="Picture 6" descr="cds_vs_cloud_era5_timeseries_slide.png"/>
+          <p:cNvPicPr>
+            <a:picLocks noChangeAspect="1"/>
+          </p:cNvPicPr>
+          <p:nvPr/>
+        </p:nvPicPr>
+        <p:blipFill>
+          <a:blip r:embed="rId2"/>
+          <a:stretch>
+            <a:fillRect/>
+          </a:stretch>
+        </p:blipFill>
+        <p:spPr>
+          <a:xfrm>
+            <a:off x="2444104" y="1554480"/>
+            <a:ext cx="7303487" cy="4407408"/>
+          </a:xfrm>
+          <a:prstGeom prst="rect">
+            <a:avLst/>
+          </a:prstGeom>
+        </p:spPr>
+      </p:pic>
+      <p:sp>
+        <p:nvSpPr>
+          <p:cNvPr id="8" name="Rectangle 7"/>
           <p:cNvSpPr/>
           <p:nvPr/>
         </p:nvSpPr>
@@ -12247,7 +11548,7 @@
       </p:sp>
       <p:sp>
         <p:nvSpPr>
-          <p:cNvPr id="12" name="Rectangle 11"/>
+          <p:cNvPr id="9" name="Rectangle 8"/>
           <p:cNvSpPr/>
           <p:nvPr/>
         </p:nvSpPr>
@@ -12291,7 +11592,7 @@
       </p:sp>
       <p:sp>
         <p:nvSpPr>
-          <p:cNvPr id="13" name="TextBox 12"/>
+          <p:cNvPr id="10" name="TextBox 9"/>
           <p:cNvSpPr txBox="1"/>
           <p:nvPr/>
         </p:nvSpPr>
@@ -12330,7 +11631,7 @@
       </p:sp>
       <p:sp>
         <p:nvSpPr>
-          <p:cNvPr id="14" name="TextBox 13"/>
+          <p:cNvPr id="11" name="TextBox 10"/>
           <p:cNvSpPr txBox="1"/>
           <p:nvPr/>
         </p:nvSpPr>
@@ -12362,7 +11663,7 @@
                 </a:solidFill>
                 <a:latin typeface="Calibri"/>
               </a:rPr>
-              <a:t>Not identical, but comparable and independently plausible — cloud ERA5 was adopted as the primary source with this caveat disclosed.</a:t>
+              <a:t>The two sources are visually near-indistinguishable for 6 of 7 variables; precipitation shows the one real, diagnosed discrepancy (convective-event spikes).</a:t>
             </a:r>
           </a:p>
         </p:txBody>
@@ -12427,7 +11728,7 @@
                 </a:solidFill>
                 <a:latin typeface="Calibri"/>
               </a:rPr>
-              <a:t>EXPERIMENT 2 — LARGE-SCALE CLOUD ERA5</a:t>
+              <a:t>PART 2 — NON-CONUS GLOBAL EXPERIMENT</a:t>
             </a:r>
           </a:p>
         </p:txBody>
@@ -12466,7 +11767,7 @@
                 </a:solidFill>
                 <a:latin typeface="Calibri"/>
               </a:rPr>
-              <a:t>Experiment 2: Large-Scale Results (70 Pixels)</a:t>
+              <a:t>Part 2: Global Results (68 Usable Pixels)</a:t>
             </a:r>
           </a:p>
         </p:txBody>
@@ -12571,7 +11872,7 @@
             </a:avLst>
           </a:prstGeom>
           <a:solidFill>
-            <a:srgbClr val="E7EEF5"/>
+            <a:srgbClr val="F3E2E8"/>
           </a:solidFill>
           <a:ln>
             <a:noFill/>
@@ -12630,11 +11931,11 @@
             <a:r>
               <a:rPr sz="2600" b="1" i="0">
                 <a:solidFill>
-                  <a:srgbClr val="1E3F5C"/>
+                  <a:srgbClr val="6B1A33"/>
                 </a:solidFill>
                 <a:latin typeface="Calibri"/>
               </a:rPr>
-              <a:t>0.890</a:t>
+              <a:t>0.353</a:t>
             </a:r>
           </a:p>
         </p:txBody>
@@ -12695,7 +11996,7 @@
             </a:avLst>
           </a:prstGeom>
           <a:solidFill>
-            <a:srgbClr val="E7EEF5"/>
+            <a:srgbClr val="F3E2E8"/>
           </a:solidFill>
           <a:ln>
             <a:noFill/>
@@ -12754,11 +12055,11 @@
             <a:r>
               <a:rPr sz="2600" b="1" i="0">
                 <a:solidFill>
-                  <a:srgbClr val="1E3F5C"/>
+                  <a:srgbClr val="6B1A33"/>
                 </a:solidFill>
                 <a:latin typeface="Calibri"/>
               </a:rPr>
-              <a:t>46/70</a:t>
+              <a:t>4/68</a:t>
             </a:r>
           </a:p>
         </p:txBody>
@@ -12819,7 +12120,7 @@
             </a:avLst>
           </a:prstGeom>
           <a:solidFill>
-            <a:srgbClr val="E7EEF5"/>
+            <a:srgbClr val="F3E2E8"/>
           </a:solidFill>
           <a:ln>
             <a:noFill/>
@@ -12878,11 +12179,11 @@
             <a:r>
               <a:rPr sz="2600" b="1" i="0">
                 <a:solidFill>
-                  <a:srgbClr val="1E3F5C"/>
+                  <a:srgbClr val="6B1A33"/>
                 </a:solidFill>
                 <a:latin typeface="Calibri"/>
               </a:rPr>
-              <a:t>0.897</a:t>
+              <a:t>0.621</a:t>
             </a:r>
           </a:p>
         </p:txBody>
@@ -12943,7 +12244,7 @@
             </a:avLst>
           </a:prstGeom>
           <a:solidFill>
-            <a:srgbClr val="E7EEF5"/>
+            <a:srgbClr val="F3E2E8"/>
           </a:solidFill>
           <a:ln>
             <a:noFill/>
@@ -13002,11 +12303,11 @@
             <a:r>
               <a:rPr sz="2600" b="1" i="0">
                 <a:solidFill>
-                  <a:srgbClr val="1E3F5C"/>
+                  <a:srgbClr val="6B1A33"/>
                 </a:solidFill>
                 <a:latin typeface="Calibri"/>
               </a:rPr>
-              <a:t>6/70</a:t>
+              <a:t>13/68</a:t>
             </a:r>
           </a:p>
         </p:txBody>
@@ -13074,7 +12375,7 @@
                 <a:gridCol w="1133856"/>
                 <a:gridCol w="1133856"/>
               </a:tblGrid>
-              <a:tr h="360680">
+              <a:tr h="295101">
                 <a:tc>
                   <a:txBody>
                     <a:bodyPr/>
@@ -13168,7 +12469,7 @@
                   </a:tcPr>
                 </a:tc>
               </a:tr>
-              <a:tr h="360680">
+              <a:tr h="295101">
                 <a:tc>
                   <a:txBody>
                     <a:bodyPr/>
@@ -13182,7 +12483,7 @@
                           </a:solidFill>
                           <a:latin typeface="Calibri"/>
                         </a:rPr>
-                        <a:t>TREES_BD</a:t>
+                        <a:t>SHRUBS-BD</a:t>
                       </a:r>
                     </a:p>
                   </a:txBody>
@@ -13205,7 +12506,7 @@
                           </a:solidFill>
                           <a:latin typeface="Calibri"/>
                         </a:rPr>
-                        <a:t>7</a:t>
+                        <a:t>6</a:t>
                       </a:r>
                     </a:p>
                   </a:txBody>
@@ -13228,7 +12529,7 @@
                           </a:solidFill>
                           <a:latin typeface="Calibri"/>
                         </a:rPr>
-                        <a:t>0.939</a:t>
+                        <a:t>0.584</a:t>
                       </a:r>
                     </a:p>
                   </a:txBody>
@@ -13251,7 +12552,7 @@
                           </a:solidFill>
                           <a:latin typeface="Calibri"/>
                         </a:rPr>
-                        <a:t>0.939</a:t>
+                        <a:t>0.571</a:t>
                       </a:r>
                     </a:p>
                   </a:txBody>
@@ -13262,7 +12563,7 @@
                   </a:tcPr>
                 </a:tc>
               </a:tr>
-              <a:tr h="360680">
+              <a:tr h="295101">
                 <a:tc>
                   <a:txBody>
                     <a:bodyPr/>
@@ -13276,7 +12577,7 @@
                           </a:solidFill>
                           <a:latin typeface="Calibri"/>
                         </a:rPr>
-                        <a:t>TREES_NE</a:t>
+                        <a:t>TREES-NE</a:t>
                       </a:r>
                     </a:p>
                   </a:txBody>
@@ -13322,7 +12623,7 @@
                           </a:solidFill>
                           <a:latin typeface="Calibri"/>
                         </a:rPr>
-                        <a:t>0.901</a:t>
+                        <a:t>0.484</a:t>
                       </a:r>
                     </a:p>
                   </a:txBody>
@@ -13345,7 +12646,7 @@
                           </a:solidFill>
                           <a:latin typeface="Calibri"/>
                         </a:rPr>
-                        <a:t>0.908</a:t>
+                        <a:t>0.481</a:t>
                       </a:r>
                     </a:p>
                   </a:txBody>
@@ -13356,7 +12657,7 @@
                   </a:tcPr>
                 </a:tc>
               </a:tr>
-              <a:tr h="360680">
+              <a:tr h="295101">
                 <a:tc>
                   <a:txBody>
                     <a:bodyPr/>
@@ -13370,7 +12671,7 @@
                           </a:solidFill>
                           <a:latin typeface="Calibri"/>
                         </a:rPr>
-                        <a:t>TREES_ND</a:t>
+                        <a:t>GRASS-NAT</a:t>
                       </a:r>
                     </a:p>
                   </a:txBody>
@@ -13393,6 +12694,194 @@
                           </a:solidFill>
                           <a:latin typeface="Calibri"/>
                         </a:rPr>
+                        <a:t>24</a:t>
+                      </a:r>
+                    </a:p>
+                  </a:txBody>
+                  <a:tcPr marT="38100" marB="38100">
+                    <a:solidFill>
+                      <a:srgbClr val="FFFFFF"/>
+                    </a:solidFill>
+                  </a:tcPr>
+                </a:tc>
+                <a:tc>
+                  <a:txBody>
+                    <a:bodyPr/>
+                    <a:lstStyle/>
+                    <a:p>
+                      <a:pPr algn="ctr"/>
+                      <a:r>
+                        <a:rPr sz="1080" b="0">
+                          <a:solidFill>
+                            <a:srgbClr val="1C2119"/>
+                          </a:solidFill>
+                          <a:latin typeface="Calibri"/>
+                        </a:rPr>
+                        <a:t>0.364</a:t>
+                      </a:r>
+                    </a:p>
+                  </a:txBody>
+                  <a:tcPr marT="38100" marB="38100">
+                    <a:solidFill>
+                      <a:srgbClr val="FFFFFF"/>
+                    </a:solidFill>
+                  </a:tcPr>
+                </a:tc>
+                <a:tc>
+                  <a:txBody>
+                    <a:bodyPr/>
+                    <a:lstStyle/>
+                    <a:p>
+                      <a:pPr algn="ctr"/>
+                      <a:r>
+                        <a:rPr sz="1080" b="0">
+                          <a:solidFill>
+                            <a:srgbClr val="1C2119"/>
+                          </a:solidFill>
+                          <a:latin typeface="Calibri"/>
+                        </a:rPr>
+                        <a:t>0.490</a:t>
+                      </a:r>
+                    </a:p>
+                  </a:txBody>
+                  <a:tcPr marT="38100" marB="38100">
+                    <a:solidFill>
+                      <a:srgbClr val="FFFFFF"/>
+                    </a:solidFill>
+                  </a:tcPr>
+                </a:tc>
+              </a:tr>
+              <a:tr h="295101">
+                <a:tc>
+                  <a:txBody>
+                    <a:bodyPr/>
+                    <a:lstStyle/>
+                    <a:p>
+                      <a:pPr algn="l"/>
+                      <a:r>
+                        <a:rPr sz="1080" b="1">
+                          <a:solidFill>
+                            <a:srgbClr val="1C2119"/>
+                          </a:solidFill>
+                          <a:latin typeface="Calibri"/>
+                        </a:rPr>
+                        <a:t>SHRUBS-ND</a:t>
+                      </a:r>
+                    </a:p>
+                  </a:txBody>
+                  <a:tcPr marT="38100" marB="38100">
+                    <a:solidFill>
+                      <a:srgbClr val="F5F6F1"/>
+                    </a:solidFill>
+                  </a:tcPr>
+                </a:tc>
+                <a:tc>
+                  <a:txBody>
+                    <a:bodyPr/>
+                    <a:lstStyle/>
+                    <a:p>
+                      <a:pPr algn="ctr"/>
+                      <a:r>
+                        <a:rPr sz="1080" b="0">
+                          <a:solidFill>
+                            <a:srgbClr val="1C2119"/>
+                          </a:solidFill>
+                          <a:latin typeface="Calibri"/>
+                        </a:rPr>
+                        <a:t>3</a:t>
+                      </a:r>
+                    </a:p>
+                  </a:txBody>
+                  <a:tcPr marT="38100" marB="38100">
+                    <a:solidFill>
+                      <a:srgbClr val="F5F6F1"/>
+                    </a:solidFill>
+                  </a:tcPr>
+                </a:tc>
+                <a:tc>
+                  <a:txBody>
+                    <a:bodyPr/>
+                    <a:lstStyle/>
+                    <a:p>
+                      <a:pPr algn="ctr"/>
+                      <a:r>
+                        <a:rPr sz="1080" b="0">
+                          <a:solidFill>
+                            <a:srgbClr val="1C2119"/>
+                          </a:solidFill>
+                          <a:latin typeface="Calibri"/>
+                        </a:rPr>
+                        <a:t>0.301</a:t>
+                      </a:r>
+                    </a:p>
+                  </a:txBody>
+                  <a:tcPr marT="38100" marB="38100">
+                    <a:solidFill>
+                      <a:srgbClr val="F5F6F1"/>
+                    </a:solidFill>
+                  </a:tcPr>
+                </a:tc>
+                <a:tc>
+                  <a:txBody>
+                    <a:bodyPr/>
+                    <a:lstStyle/>
+                    <a:p>
+                      <a:pPr algn="ctr"/>
+                      <a:r>
+                        <a:rPr sz="1080" b="0">
+                          <a:solidFill>
+                            <a:srgbClr val="1C2119"/>
+                          </a:solidFill>
+                          <a:latin typeface="Calibri"/>
+                        </a:rPr>
+                        <a:t>0.374</a:t>
+                      </a:r>
+                    </a:p>
+                  </a:txBody>
+                  <a:tcPr marT="38100" marB="38100">
+                    <a:solidFill>
+                      <a:srgbClr val="F5F6F1"/>
+                    </a:solidFill>
+                  </a:tcPr>
+                </a:tc>
+              </a:tr>
+              <a:tr h="295101">
+                <a:tc>
+                  <a:txBody>
+                    <a:bodyPr/>
+                    <a:lstStyle/>
+                    <a:p>
+                      <a:pPr algn="l"/>
+                      <a:r>
+                        <a:rPr sz="1080" b="1">
+                          <a:solidFill>
+                            <a:srgbClr val="1C2119"/>
+                          </a:solidFill>
+                          <a:latin typeface="Calibri"/>
+                        </a:rPr>
+                        <a:t>TREES-BD</a:t>
+                      </a:r>
+                    </a:p>
+                  </a:txBody>
+                  <a:tcPr marT="38100" marB="38100">
+                    <a:solidFill>
+                      <a:srgbClr val="FFFFFF"/>
+                    </a:solidFill>
+                  </a:tcPr>
+                </a:tc>
+                <a:tc>
+                  <a:txBody>
+                    <a:bodyPr/>
+                    <a:lstStyle/>
+                    <a:p>
+                      <a:pPr algn="ctr"/>
+                      <a:r>
+                        <a:rPr sz="1080" b="0">
+                          <a:solidFill>
+                            <a:srgbClr val="1C2119"/>
+                          </a:solidFill>
+                          <a:latin typeface="Calibri"/>
+                        </a:rPr>
                         <a:t>6</a:t>
                       </a:r>
                     </a:p>
@@ -13416,7 +12905,7 @@
                           </a:solidFill>
                           <a:latin typeface="Calibri"/>
                         </a:rPr>
-                        <a:t>0.860</a:t>
+                        <a:t>0.261</a:t>
                       </a:r>
                     </a:p>
                   </a:txBody>
@@ -13439,7 +12928,7 @@
                           </a:solidFill>
                           <a:latin typeface="Calibri"/>
                         </a:rPr>
-                        <a:t>0.929</a:t>
+                        <a:t>0.173</a:t>
                       </a:r>
                     </a:p>
                   </a:txBody>
@@ -13450,7 +12939,7 @@
                   </a:tcPr>
                 </a:tc>
               </a:tr>
-              <a:tr h="360680">
+              <a:tr h="295101">
                 <a:tc>
                   <a:txBody>
                     <a:bodyPr/>
@@ -13464,7 +12953,7 @@
                           </a:solidFill>
                           <a:latin typeface="Calibri"/>
                         </a:rPr>
-                        <a:t>SHRUBS_NE</a:t>
+                        <a:t>GRASS-MAN</a:t>
                       </a:r>
                     </a:p>
                   </a:txBody>
@@ -13487,7 +12976,7 @@
                           </a:solidFill>
                           <a:latin typeface="Calibri"/>
                         </a:rPr>
-                        <a:t>7</a:t>
+                        <a:t>9</a:t>
                       </a:r>
                     </a:p>
                   </a:txBody>
@@ -13510,7 +12999,7 @@
                           </a:solidFill>
                           <a:latin typeface="Calibri"/>
                         </a:rPr>
-                        <a:t>0.842</a:t>
+                        <a:t>0.240</a:t>
                       </a:r>
                     </a:p>
                   </a:txBody>
@@ -13533,7 +13022,7 @@
                           </a:solidFill>
                           <a:latin typeface="Calibri"/>
                         </a:rPr>
-                        <a:t>0.843</a:t>
+                        <a:t>0.351</a:t>
                       </a:r>
                     </a:p>
                   </a:txBody>
@@ -13544,7 +13033,7 @@
                   </a:tcPr>
                 </a:tc>
               </a:tr>
-              <a:tr h="360680">
+              <a:tr h="295101">
                 <a:tc>
                   <a:txBody>
                     <a:bodyPr/>
@@ -13558,7 +13047,7 @@
                           </a:solidFill>
                           <a:latin typeface="Calibri"/>
                         </a:rPr>
-                        <a:t>GRASS_MAN</a:t>
+                        <a:t>SHRUBS-NE</a:t>
                       </a:r>
                     </a:p>
                   </a:txBody>
@@ -13581,7 +13070,7 @@
                           </a:solidFill>
                           <a:latin typeface="Calibri"/>
                         </a:rPr>
-                        <a:t>12</a:t>
+                        <a:t>3</a:t>
                       </a:r>
                     </a:p>
                   </a:txBody>
@@ -13604,7 +13093,7 @@
                           </a:solidFill>
                           <a:latin typeface="Calibri"/>
                         </a:rPr>
-                        <a:t>0.809</a:t>
+                        <a:t>0.199</a:t>
                       </a:r>
                     </a:p>
                   </a:txBody>
@@ -13627,7 +13116,7 @@
                           </a:solidFill>
                           <a:latin typeface="Calibri"/>
                         </a:rPr>
-                        <a:t>0.903</a:t>
+                        <a:t>0.601</a:t>
                       </a:r>
                     </a:p>
                   </a:txBody>
@@ -13638,7 +13127,7 @@
                   </a:tcPr>
                 </a:tc>
               </a:tr>
-              <a:tr h="360680">
+              <a:tr h="295101">
                 <a:tc>
                   <a:txBody>
                     <a:bodyPr/>
@@ -13652,7 +13141,7 @@
                           </a:solidFill>
                           <a:latin typeface="Calibri"/>
                         </a:rPr>
-                        <a:t>GRASS_NAT</a:t>
+                        <a:t>TREES-BE</a:t>
                       </a:r>
                     </a:p>
                   </a:txBody>
@@ -13675,7 +13164,7 @@
                           </a:solidFill>
                           <a:latin typeface="Calibri"/>
                         </a:rPr>
-                        <a:t>19</a:t>
+                        <a:t>6</a:t>
                       </a:r>
                     </a:p>
                   </a:txBody>
@@ -13698,7 +13187,7 @@
                           </a:solidFill>
                           <a:latin typeface="Calibri"/>
                         </a:rPr>
-                        <a:t>0.643</a:t>
+                        <a:t>0.037</a:t>
                       </a:r>
                     </a:p>
                   </a:txBody>
@@ -13721,7 +13210,7 @@
                           </a:solidFill>
                           <a:latin typeface="Calibri"/>
                         </a:rPr>
-                        <a:t>0.904</a:t>
+                        <a:t>0.038</a:t>
                       </a:r>
                     </a:p>
                   </a:txBody>
@@ -13732,7 +13221,7 @@
                   </a:tcPr>
                 </a:tc>
               </a:tr>
-              <a:tr h="360680">
+              <a:tr h="295101">
                 <a:tc>
                   <a:txBody>
                     <a:bodyPr/>
@@ -13746,7 +13235,7 @@
                           </a:solidFill>
                           <a:latin typeface="Calibri"/>
                         </a:rPr>
-                        <a:t>SHRUBS_BD</a:t>
+                        <a:t>SHRUBS-BE</a:t>
                       </a:r>
                     </a:p>
                   </a:txBody>
@@ -13769,7 +13258,7 @@
                           </a:solidFill>
                           <a:latin typeface="Calibri"/>
                         </a:rPr>
-                        <a:t>7</a:t>
+                        <a:t>3</a:t>
                       </a:r>
                     </a:p>
                   </a:txBody>
@@ -13792,7 +13281,7 @@
                           </a:solidFill>
                           <a:latin typeface="Calibri"/>
                         </a:rPr>
-                        <a:t>0.471</a:t>
+                        <a:t>-0.055</a:t>
                       </a:r>
                     </a:p>
                   </a:txBody>
@@ -13815,7 +13304,7 @@
                           </a:solidFill>
                           <a:latin typeface="Calibri"/>
                         </a:rPr>
-                        <a:t>0.519</a:t>
+                        <a:t>0.143</a:t>
                       </a:r>
                     </a:p>
                   </a:txBody>
@@ -13826,7 +13315,7 @@
                   </a:tcPr>
                 </a:tc>
               </a:tr>
-              <a:tr h="360680">
+              <a:tr h="295110">
                 <a:tc>
                   <a:txBody>
                     <a:bodyPr/>
@@ -13840,7 +13329,7 @@
                           </a:solidFill>
                           <a:latin typeface="Calibri"/>
                         </a:rPr>
-                        <a:t>SHRUBS_ND</a:t>
+                        <a:t>TREES-ND</a:t>
                       </a:r>
                     </a:p>
                   </a:txBody>
@@ -13863,7 +13352,7 @@
                           </a:solidFill>
                           <a:latin typeface="Calibri"/>
                         </a:rPr>
-                        <a:t>6</a:t>
+                        <a:t>2</a:t>
                       </a:r>
                     </a:p>
                   </a:txBody>
@@ -13886,7 +13375,7 @@
                           </a:solidFill>
                           <a:latin typeface="Calibri"/>
                         </a:rPr>
-                        <a:t>0.313</a:t>
+                        <a:t>-0.056</a:t>
                       </a:r>
                     </a:p>
                   </a:txBody>
@@ -13909,7 +13398,7 @@
                           </a:solidFill>
                           <a:latin typeface="Calibri"/>
                         </a:rPr>
-                        <a:t>0.406</a:t>
+                        <a:t>-0.056</a:t>
                       </a:r>
                     </a:p>
                   </a:txBody>
@@ -13926,7 +13415,7 @@
       </p:graphicFrame>
       <p:pic>
         <p:nvPicPr>
-          <p:cNvPr id="19" name="Picture 18" descr="exp2_r2_by_pixel_and_class.png"/>
+          <p:cNvPr id="19" name="Picture 18" descr="global70_r2_by_pixel_and_class.png"/>
           <p:cNvPicPr>
             <a:picLocks noChangeAspect="1"/>
           </p:cNvPicPr>
@@ -14109,7 +13598,7 @@
                 </a:solidFill>
                 <a:latin typeface="Calibri"/>
               </a:rPr>
-              <a:t>Median R²=0.890, 46/70 pixels ≥0.8 — comparable in shape to Experiment 1, using an independent meteorological source.</a:t>
+              <a:t>Median R²=0.353, only 4/68 pixels ≥0.8 — a real, substantially weaker result than either CONUS study.</a:t>
             </a:r>
           </a:p>
         </p:txBody>
